--- a/downloads/slides/Lesson12_Slides.pptx
+++ b/downloads/slides/Lesson12_Slides.pptx
@@ -951,7 +951,7 @@
           <a:p>
             <a:r>
               <a:rPr lang="en-US" dirty="0"/>
-              <a:t>Step 3 · 6:18–6:30 · Listening + "Say it" (L12_listening.mp3, about 1:40). Audio: L12_listening.mp3 (about 1:40). The audio plays once, play again if needed. Audio coming soon: until it is ready, read the script with a volunteer learner.</a:t>
+              <a:t>Step 3 · 6:18–6:30 · Listening + "Say it" (L12_listening.mp3, about 1:31). Audio: L12_listening.mp3 (about 1:31). The audio plays once, play again if needed. No speaker? Read the script with a volunteer learner.</a:t>
             </a:r>
           </a:p>
           <a:p>
@@ -3186,1503 +3186,6 @@
 </file>
 
 <file path=ppt/slides/slide10.xml><?xml version="1.0" encoding="utf-8"?>
-<p:sld xmlns:a="http://schemas.openxmlformats.org/drawingml/2006/main" xmlns:r="http://schemas.openxmlformats.org/officeDocument/2006/relationships" xmlns:p="http://schemas.openxmlformats.org/presentationml/2006/main">
-  <p:cSld name="Slide 5">
-    <p:bg>
-      <p:bgPr>
-        <a:solidFill>
-          <a:srgbClr val="F1F5FB"/>
-        </a:solidFill>
-      </p:bgPr>
-    </p:bg>
-    <p:spTree>
-      <p:nvGrpSpPr>
-        <p:cNvPr id="1" name=""/>
-        <p:cNvGrpSpPr/>
-        <p:nvPr/>
-      </p:nvGrpSpPr>
-      <p:grpSpPr>
-        <a:xfrm>
-          <a:off x="0" y="0"/>
-          <a:ext cx="0" cy="0"/>
-          <a:chOff x="0" y="0"/>
-          <a:chExt cx="0" cy="0"/>
-        </a:xfrm>
-      </p:grpSpPr>
-      <p:sp>
-        <p:nvSpPr>
-          <p:cNvPr id="2" name="Shape 0"/>
-          <p:cNvSpPr/>
-          <p:nvPr/>
-        </p:nvSpPr>
-        <p:spPr>
-          <a:xfrm>
-            <a:off x="5076429" y="1163345"/>
-            <a:ext cx="5814670" cy="1863547"/>
-          </a:xfrm>
-          <a:prstGeom prst="roundRect">
-            <a:avLst>
-              <a:gd name="adj" fmla="val 16667"/>
-            </a:avLst>
-          </a:prstGeom>
-          <a:solidFill>
-            <a:srgbClr val="8FAFE3"/>
-          </a:solidFill>
-          <a:ln/>
-        </p:spPr>
-        <p:txBody>
-          <a:bodyPr/>
-          <a:p/>
-        </p:txBody>
-      </p:sp>
-      <p:sp>
-        <p:nvSpPr>
-          <p:cNvPr id="3" name="Shape 1"/>
-          <p:cNvSpPr/>
-          <p:nvPr/>
-        </p:nvSpPr>
-        <p:spPr>
-          <a:xfrm>
-            <a:off x="5110582" y="1087222"/>
-            <a:ext cx="5814670" cy="1863547"/>
-          </a:xfrm>
-          <a:prstGeom prst="roundRect">
-            <a:avLst>
-              <a:gd name="adj" fmla="val 16667"/>
-            </a:avLst>
-          </a:prstGeom>
-          <a:solidFill>
-            <a:srgbClr val="FFFFFF"/>
-          </a:solidFill>
-          <a:ln/>
-        </p:spPr>
-        <p:txBody>
-          <a:bodyPr/>
-          <a:p/>
-        </p:txBody>
-      </p:sp>
-      <p:sp>
-        <p:nvSpPr>
-          <p:cNvPr id="4" name="Shape 2"/>
-          <p:cNvSpPr/>
-          <p:nvPr/>
-        </p:nvSpPr>
-        <p:spPr>
-          <a:xfrm flipV="1">
-            <a:off x="-106985" y="-101498"/>
-            <a:ext cx="3844138" cy="6418174"/>
-          </a:xfrm>
-          <a:prstGeom prst="round1Rect">
-            <a:avLst>
-              <a:gd name="adj" fmla="val 23087"/>
-            </a:avLst>
-          </a:prstGeom>
-          <a:solidFill>
-            <a:srgbClr val="B9D2F7"/>
-          </a:solidFill>
-          <a:ln w="76200">
-            <a:solidFill>
-              <a:srgbClr val="FFFFFF"/>
-            </a:solidFill>
-            <a:prstDash val="solid"/>
-          </a:ln>
-        </p:spPr>
-        <p:txBody>
-          <a:bodyPr/>
-          <a:p/>
-        </p:txBody>
-      </p:sp>
-      <p:sp>
-        <p:nvSpPr>
-          <p:cNvPr id="7" name="Text 5"/>
-          <p:cNvSpPr/>
-          <p:nvPr/>
-        </p:nvSpPr>
-        <p:spPr>
-          <a:xfrm>
-            <a:off x="5333695" y="1280160"/>
-            <a:ext cx="4846320" cy="1463040"/>
-          </a:xfrm>
-          <a:prstGeom prst="rect">
-            <a:avLst/>
-          </a:prstGeom>
-          <a:noFill/>
-          <a:ln/>
-        </p:spPr>
-        <p:txBody>
-          <a:bodyPr wrap="square" rtlCol="0" anchor="ctr"/>
-          <a:lstStyle/>
-          <a:p>
-            <a:pPr algn="l" indent="0" marL="0">
-              <a:spcAft>
-                <a:spcPts val="400"/>
-              </a:spcAft>
-              <a:buNone/>
-            </a:pPr>
-            <a:r>
-              <a:rPr lang="en-US" sz="2000" dirty="0" b="1">
-                <a:solidFill>
-                  <a:srgbClr val="5B3FC4"/>
-                </a:solidFill>
-                <a:latin typeface="Lexend Deca" pitchFamily="34" charset="0"/>
-                <a:ea typeface="Lexend Deca" pitchFamily="34" charset="-122"/>
-                <a:cs typeface="Lexend Deca" pitchFamily="34" charset="-120"/>
-              </a:rPr>
-              <a:t>Grammar Box 1</a:t>
-            </a:r>
-            <a:endParaRPr lang="en-US" sz="2000" dirty="0"/>
-          </a:p>
-          <a:p>
-            <a:pPr algn="l" indent="0" marL="0">
-              <a:spcAft>
-                <a:spcPts val="400"/>
-              </a:spcAft>
-              <a:buNone/>
-            </a:pPr>
-            <a:r>
-              <a:rPr lang="en-US" sz="3000" dirty="0" b="1">
-                <a:solidFill>
-                  <a:srgbClr val="1B2236"/>
-                </a:solidFill>
-                <a:latin typeface="Lexend Deca" pitchFamily="34" charset="0"/>
-                <a:ea typeface="Lexend Deca" pitchFamily="34" charset="-122"/>
-                <a:cs typeface="Lexend Deca" pitchFamily="34" charset="-120"/>
-              </a:rPr>
-              <a:t>Do I have to ...?</a:t>
-            </a:r>
-            <a:endParaRPr lang="en-US" sz="3000" dirty="0"/>
-          </a:p>
-        </p:txBody>
-      </p:sp>
-      <p:sp>
-        <p:nvSpPr>
-          <p:cNvPr id="8" name="Text 6"/>
-          <p:cNvSpPr/>
-          <p:nvPr/>
-        </p:nvSpPr>
-        <p:spPr>
-          <a:xfrm>
-            <a:off x="5166360" y="3246120"/>
-            <a:ext cx="2743200" cy="457200"/>
-          </a:xfrm>
-          <a:prstGeom prst="rect">
-            <a:avLst/>
-          </a:prstGeom>
-          <a:noFill/>
-          <a:ln/>
-        </p:spPr>
-        <p:txBody>
-          <a:bodyPr wrap="square" rtlCol="0" anchor="ctr"/>
-          <a:lstStyle/>
-          <a:p>
-            <a:pPr algn="l" indent="0" marL="0">
-              <a:buNone/>
-            </a:pPr>
-            <a:r>
-              <a:rPr lang="en-US" sz="2000" dirty="0" b="1">
-                <a:solidFill>
-                  <a:srgbClr val="5B3FC4"/>
-                </a:solidFill>
-                <a:latin typeface="Lexend Deca" pitchFamily="34" charset="0"/>
-                <a:ea typeface="Lexend Deca" pitchFamily="34" charset="-122"/>
-                <a:cs typeface="Lexend Deca" pitchFamily="34" charset="-120"/>
-              </a:rPr>
-              <a:t>QUESTION</a:t>
-            </a:r>
-            <a:endParaRPr lang="en-US" sz="2000" dirty="0"/>
-          </a:p>
-        </p:txBody>
-      </p:sp>
-      <p:sp>
-        <p:nvSpPr>
-          <p:cNvPr id="11" name="Text 9"/>
-          <p:cNvSpPr/>
-          <p:nvPr/>
-        </p:nvSpPr>
-        <p:spPr>
-          <a:xfrm>
-            <a:off x="8741664" y="3246120"/>
-            <a:ext cx="2743200" cy="457200"/>
-          </a:xfrm>
-          <a:prstGeom prst="rect">
-            <a:avLst/>
-          </a:prstGeom>
-          <a:noFill/>
-          <a:ln/>
-        </p:spPr>
-        <p:txBody>
-          <a:bodyPr wrap="square" rtlCol="0" anchor="ctr"/>
-          <a:lstStyle/>
-          <a:p>
-            <a:pPr algn="l" indent="0" marL="0">
-              <a:buNone/>
-            </a:pPr>
-            <a:r>
-              <a:rPr lang="en-US" sz="2000" dirty="0" b="1">
-                <a:solidFill>
-                  <a:srgbClr val="5B3FC4"/>
-                </a:solidFill>
-                <a:latin typeface="Lexend Deca" pitchFamily="34" charset="0"/>
-                <a:ea typeface="Lexend Deca" pitchFamily="34" charset="-122"/>
-                <a:cs typeface="Lexend Deca" pitchFamily="34" charset="-120"/>
-              </a:rPr>
-              <a:t>ANSWER</a:t>
-            </a:r>
-            <a:endParaRPr lang="en-US" sz="2000" dirty="0"/>
-          </a:p>
-        </p:txBody>
-      </p:sp>
-      <p:sp>
-        <p:nvSpPr>
-          <p:cNvPr id="14" name="Shape 12"/>
-          <p:cNvSpPr/>
-          <p:nvPr/>
-        </p:nvSpPr>
-        <p:spPr>
-          <a:xfrm>
-            <a:off x="10245852" y="2478938"/>
-            <a:ext cx="1024128" cy="967435"/>
-          </a:xfrm>
-          <a:prstGeom prst="star10">
-            <a:avLst/>
-          </a:prstGeom>
-          <a:solidFill>
-            <a:srgbClr val="8FAFE3"/>
-          </a:solidFill>
-          <a:ln/>
-        </p:spPr>
-        <p:txBody>
-          <a:bodyPr/>
-          <a:p/>
-        </p:txBody>
-      </p:sp>
-      <p:sp>
-        <p:nvSpPr>
-          <p:cNvPr id="15" name="Shape 13"/>
-          <p:cNvSpPr/>
-          <p:nvPr/>
-        </p:nvSpPr>
-        <p:spPr>
-          <a:xfrm>
-            <a:off x="10328148" y="2466137"/>
-            <a:ext cx="1042416" cy="1042416"/>
-          </a:xfrm>
-          <a:prstGeom prst="star10">
-            <a:avLst/>
-          </a:prstGeom>
-          <a:solidFill>
-            <a:srgbClr val="FFE28C"/>
-          </a:solidFill>
-          <a:ln/>
-        </p:spPr>
-        <p:txBody>
-          <a:bodyPr/>
-          <a:p/>
-        </p:txBody>
-      </p:sp>
-      <p:sp>
-        <p:nvSpPr>
-          <p:cNvPr id="16" name="Shape 14"/>
-          <p:cNvSpPr/>
-          <p:nvPr/>
-        </p:nvSpPr>
-        <p:spPr>
-          <a:xfrm rot="900000">
-            <a:off x="10611612" y="2765146"/>
-            <a:ext cx="445313" cy="445313"/>
-          </a:xfrm>
-          <a:prstGeom prst="mathPlus">
-            <a:avLst/>
-          </a:prstGeom>
-          <a:solidFill>
-            <a:srgbClr val="1B2236"/>
-          </a:solidFill>
-          <a:ln/>
-        </p:spPr>
-        <p:txBody>
-          <a:bodyPr/>
-          <a:p/>
-        </p:txBody>
-      </p:sp>
-      <p:pic>
-        <p:nvPicPr>
-          <p:cNvPr id="44" name="Picture 44" descr="L12_fill_out_a_form.png"/>
-          <p:cNvPicPr>
-            <a:picLocks noChangeAspect="1"/>
-          </p:cNvPicPr>
-          <p:nvPr/>
-        </p:nvPicPr>
-        <p:blipFill>
-          <a:blip r:embed="rIdQ1"/>
-          <a:stretch>
-            <a:fillRect/>
-          </a:stretch>
-        </p:blipFill>
-        <p:spPr>
-          <a:xfrm>
-            <a:off x="699516" y="2264969"/>
-            <a:ext cx="3326587" cy="2328611"/>
-          </a:xfrm>
-          <a:prstGeom prst="rect">
-            <a:avLst/>
-          </a:prstGeom>
-        </p:spPr>
-      </p:pic>
-      <p:sp>
-        <p:nvSpPr>
-          <p:cNvPr id="45" name="Highlight"/>
-          <p:cNvSpPr/>
-          <p:nvPr/>
-        </p:nvSpPr>
-        <p:spPr>
-          <a:xfrm>
-            <a:off x="5138928" y="3899916"/>
-            <a:ext cx="960120" cy="566928"/>
-          </a:xfrm>
-          <a:prstGeom prst="roundRect">
-            <a:avLst>
-              <a:gd name="adj" fmla="val 22000"/>
-            </a:avLst>
-          </a:prstGeom>
-          <a:solidFill>
-            <a:srgbClr val="FFE28C"/>
-          </a:solidFill>
-          <a:ln w="38100">
-            <a:noFill/>
-          </a:ln>
-        </p:spPr>
-        <p:txBody>
-          <a:bodyPr wrap="square" lIns="73152" tIns="36576" rIns="73152" bIns="36576" rtlCol="0" anchor="ctr">
-            <a:noAutofit/>
-          </a:bodyPr>
-          <a:lstStyle/>
-          <a:p>
-            <a:pPr algn="l" indent="0" marL="0">
-              <a:buNone/>
-            </a:pPr>
-            <a:r>
-              <a:rPr lang="en-US" sz="2000" dirty="0">
-                <a:solidFill>
-                  <a:srgbClr val="1B2236"/>
-                </a:solidFill>
-                <a:latin typeface="Lexend Deca" pitchFamily="34" charset="0"/>
-                <a:ea typeface="Lexend Deca" pitchFamily="34" charset="-122"/>
-                <a:cs typeface="Lexend Deca" pitchFamily="34" charset="-120"/>
-              </a:rPr>
-              <a:t/>
-            </a:r>
-            <a:endParaRPr lang="en-US" sz="2000" dirty="0"/>
-          </a:p>
-        </p:txBody>
-      </p:sp>
-      <p:sp>
-        <p:nvSpPr>
-          <p:cNvPr id="46" name="Helper"/>
-          <p:cNvSpPr/>
-          <p:nvPr/>
-        </p:nvSpPr>
-        <p:spPr>
-          <a:xfrm>
-            <a:off x="5138928" y="3749040"/>
-            <a:ext cx="960120" cy="868680"/>
-          </a:xfrm>
-          <a:prstGeom prst="rect">
-            <a:avLst/>
-          </a:prstGeom>
-          <a:noFill/>
-          <a:ln w="38100">
-            <a:noFill/>
-          </a:ln>
-        </p:spPr>
-        <p:txBody>
-          <a:bodyPr wrap="square" lIns="18288" tIns="36576" rIns="18288" bIns="36576" rtlCol="0" anchor="ctr">
-            <a:noAutofit/>
-          </a:bodyPr>
-          <a:lstStyle/>
-          <a:p>
-            <a:pPr algn="ctr" indent="0" marL="0">
-              <a:buNone/>
-            </a:pPr>
-            <a:r>
-              <a:rPr lang="en-US" sz="2600" dirty="0" b="1">
-                <a:solidFill>
-                  <a:srgbClr val="1B2236"/>
-                </a:solidFill>
-                <a:latin typeface="Lexend Deca" pitchFamily="34" charset="0"/>
-                <a:ea typeface="Lexend Deca" pitchFamily="34" charset="-122"/>
-                <a:cs typeface="Lexend Deca" pitchFamily="34" charset="-120"/>
-              </a:rPr>
-              <a:t>Do</a:t>
-            </a:r>
-            <a:endParaRPr lang="en-US" sz="2600" dirty="0"/>
-          </a:p>
-        </p:txBody>
-      </p:sp>
-      <p:sp>
-        <p:nvSpPr>
-          <p:cNvPr id="47" name="Question"/>
-          <p:cNvSpPr/>
-          <p:nvPr/>
-        </p:nvSpPr>
-        <p:spPr>
-          <a:xfrm>
-            <a:off x="6144768" y="3749040"/>
-            <a:ext cx="2487168" cy="868680"/>
-          </a:xfrm>
-          <a:prstGeom prst="rect">
-            <a:avLst/>
-          </a:prstGeom>
-          <a:noFill/>
-          <a:ln w="38100">
-            <a:noFill/>
-          </a:ln>
-        </p:spPr>
-        <p:txBody>
-          <a:bodyPr wrap="square" lIns="73152" tIns="36576" rIns="73152" bIns="36576" rtlCol="0" anchor="ctr">
-            <a:noAutofit/>
-          </a:bodyPr>
-          <a:lstStyle/>
-          <a:p>
-            <a:pPr algn="l" indent="0" marL="0">
-              <a:buNone/>
-            </a:pPr>
-            <a:r>
-              <a:rPr lang="en-US" sz="2200" dirty="0">
-                <a:solidFill>
-                  <a:srgbClr val="1B2236"/>
-                </a:solidFill>
-                <a:latin typeface="Lexend Deca" pitchFamily="34" charset="0"/>
-                <a:ea typeface="Lexend Deca" pitchFamily="34" charset="-122"/>
-                <a:cs typeface="Lexend Deca" pitchFamily="34" charset="-120"/>
-              </a:rPr>
-              <a:t>I have to pay today?</a:t>
-            </a:r>
-            <a:endParaRPr lang="en-US" sz="2200" dirty="0"/>
-          </a:p>
-        </p:txBody>
-      </p:sp>
-      <p:sp>
-        <p:nvSpPr>
-          <p:cNvPr id="49" name="Answer bg"/>
-          <p:cNvSpPr/>
-          <p:nvPr/>
-        </p:nvSpPr>
-        <p:spPr>
-          <a:xfrm>
-            <a:off x="8668512" y="3749040"/>
-            <a:ext cx="3017520" cy="868680"/>
-          </a:xfrm>
-          <a:prstGeom prst="roundRect">
-            <a:avLst>
-              <a:gd name="adj" fmla="val 22000"/>
-            </a:avLst>
-          </a:prstGeom>
-          <a:solidFill>
-            <a:srgbClr val="C9B8F2"/>
-          </a:solidFill>
-          <a:ln w="38100">
-            <a:noFill/>
-          </a:ln>
-        </p:spPr>
-        <p:txBody>
-          <a:bodyPr wrap="square" lIns="73152" tIns="36576" rIns="73152" bIns="36576" rtlCol="0" anchor="ctr">
-            <a:noAutofit/>
-          </a:bodyPr>
-          <a:lstStyle/>
-          <a:p>
-            <a:pPr algn="l" indent="0" marL="0">
-              <a:buNone/>
-            </a:pPr>
-            <a:r>
-              <a:rPr lang="en-US" sz="2000" dirty="0">
-                <a:solidFill>
-                  <a:srgbClr val="1B2236"/>
-                </a:solidFill>
-                <a:latin typeface="Lexend Deca" pitchFamily="34" charset="0"/>
-                <a:ea typeface="Lexend Deca" pitchFamily="34" charset="-122"/>
-                <a:cs typeface="Lexend Deca" pitchFamily="34" charset="-120"/>
-              </a:rPr>
-              <a:t/>
-            </a:r>
-            <a:endParaRPr lang="en-US" sz="2000" dirty="0"/>
-          </a:p>
-        </p:txBody>
-      </p:sp>
-      <p:sp>
-        <p:nvSpPr>
-          <p:cNvPr id="48" name="Answer"/>
-          <p:cNvSpPr/>
-          <p:nvPr/>
-        </p:nvSpPr>
-        <p:spPr>
-          <a:xfrm>
-            <a:off x="8668512" y="3749040"/>
-            <a:ext cx="3017520" cy="868680"/>
-          </a:xfrm>
-          <a:prstGeom prst="rect">
-            <a:avLst/>
-          </a:prstGeom>
-          <a:noFill/>
-          <a:ln w="38100">
-            <a:noFill/>
-          </a:ln>
-        </p:spPr>
-        <p:txBody>
-          <a:bodyPr wrap="square" lIns="73152" tIns="36576" rIns="73152" bIns="36576" rtlCol="0" anchor="ctr">
-            <a:noAutofit/>
-          </a:bodyPr>
-          <a:lstStyle/>
-          <a:p>
-            <a:pPr algn="l" indent="0" marL="0">
-              <a:buNone/>
-            </a:pPr>
-            <a:r>
-              <a:rPr lang="en-US" sz="2200" dirty="0">
-                <a:solidFill>
-                  <a:srgbClr val="1B2236"/>
-                </a:solidFill>
-                <a:latin typeface="Lexend Deca" pitchFamily="34" charset="0"/>
-                <a:ea typeface="Lexend Deca" pitchFamily="34" charset="-122"/>
-                <a:cs typeface="Lexend Deca" pitchFamily="34" charset="-120"/>
-              </a:rPr>
-              <a:t>Yes, you </a:t>
-            </a:r>
-            <a:r>
-              <a:rPr lang="en-US" sz="2200" dirty="0" b="1">
-                <a:solidFill>
-                  <a:srgbClr val="1B2236"/>
-                </a:solidFill>
-                <a:latin typeface="Lexend Deca" pitchFamily="34" charset="0"/>
-                <a:ea typeface="Lexend Deca" pitchFamily="34" charset="-122"/>
-                <a:cs typeface="Lexend Deca" pitchFamily="34" charset="-120"/>
-              </a:rPr>
-              <a:t>do</a:t>
-            </a:r>
-            <a:r>
-              <a:rPr lang="en-US" sz="2200" dirty="0">
-                <a:solidFill>
-                  <a:srgbClr val="1B2236"/>
-                </a:solidFill>
-                <a:latin typeface="Lexend Deca" pitchFamily="34" charset="0"/>
-                <a:ea typeface="Lexend Deca" pitchFamily="34" charset="-122"/>
-                <a:cs typeface="Lexend Deca" pitchFamily="34" charset="-120"/>
-              </a:rPr>
-              <a:t>.</a:t>
-            </a:r>
-            <a:endParaRPr lang="en-US" sz="2200" dirty="0"/>
-          </a:p>
-          <a:p>
-            <a:pPr algn="l" indent="0" marL="0">
-              <a:buNone/>
-            </a:pPr>
-            <a:r>
-              <a:rPr lang="en-US" sz="2200" dirty="0">
-                <a:solidFill>
-                  <a:srgbClr val="1B2236"/>
-                </a:solidFill>
-                <a:latin typeface="Lexend Deca" pitchFamily="34" charset="0"/>
-                <a:ea typeface="Lexend Deca" pitchFamily="34" charset="-122"/>
-                <a:cs typeface="Lexend Deca" pitchFamily="34" charset="-120"/>
-              </a:rPr>
-              <a:t>No, you </a:t>
-            </a:r>
-            <a:r>
-              <a:rPr lang="en-US" sz="2200" dirty="0" b="1">
-                <a:solidFill>
-                  <a:srgbClr val="1B2236"/>
-                </a:solidFill>
-                <a:latin typeface="Lexend Deca" pitchFamily="34" charset="0"/>
-                <a:ea typeface="Lexend Deca" pitchFamily="34" charset="-122"/>
-                <a:cs typeface="Lexend Deca" pitchFamily="34" charset="-120"/>
-              </a:rPr>
-              <a:t>don't</a:t>
-            </a:r>
-            <a:r>
-              <a:rPr lang="en-US" sz="2200" dirty="0">
-                <a:solidFill>
-                  <a:srgbClr val="1B2236"/>
-                </a:solidFill>
-                <a:latin typeface="Lexend Deca" pitchFamily="34" charset="0"/>
-                <a:ea typeface="Lexend Deca" pitchFamily="34" charset="-122"/>
-                <a:cs typeface="Lexend Deca" pitchFamily="34" charset="-120"/>
-              </a:rPr>
-              <a:t>.</a:t>
-            </a:r>
-            <a:endParaRPr lang="en-US" sz="2200" dirty="0"/>
-          </a:p>
-        </p:txBody>
-      </p:sp>
-      <p:sp>
-        <p:nvSpPr>
-          <p:cNvPr id="50" name="Highlight"/>
-          <p:cNvSpPr/>
-          <p:nvPr/>
-        </p:nvSpPr>
-        <p:spPr>
-          <a:xfrm>
-            <a:off x="5138928" y="4814316"/>
-            <a:ext cx="960120" cy="566928"/>
-          </a:xfrm>
-          <a:prstGeom prst="roundRect">
-            <a:avLst>
-              <a:gd name="adj" fmla="val 22000"/>
-            </a:avLst>
-          </a:prstGeom>
-          <a:solidFill>
-            <a:srgbClr val="FFE28C"/>
-          </a:solidFill>
-          <a:ln w="38100">
-            <a:noFill/>
-          </a:ln>
-        </p:spPr>
-        <p:txBody>
-          <a:bodyPr wrap="square" lIns="73152" tIns="36576" rIns="73152" bIns="36576" rtlCol="0" anchor="ctr">
-            <a:noAutofit/>
-          </a:bodyPr>
-          <a:lstStyle/>
-          <a:p>
-            <a:pPr algn="l" indent="0" marL="0">
-              <a:buNone/>
-            </a:pPr>
-            <a:r>
-              <a:rPr lang="en-US" sz="2000" dirty="0">
-                <a:solidFill>
-                  <a:srgbClr val="1B2236"/>
-                </a:solidFill>
-                <a:latin typeface="Lexend Deca" pitchFamily="34" charset="0"/>
-                <a:ea typeface="Lexend Deca" pitchFamily="34" charset="-122"/>
-                <a:cs typeface="Lexend Deca" pitchFamily="34" charset="-120"/>
-              </a:rPr>
-              <a:t/>
-            </a:r>
-            <a:endParaRPr lang="en-US" sz="2000" dirty="0"/>
-          </a:p>
-        </p:txBody>
-      </p:sp>
-      <p:sp>
-        <p:nvSpPr>
-          <p:cNvPr id="51" name="Helper"/>
-          <p:cNvSpPr/>
-          <p:nvPr/>
-        </p:nvSpPr>
-        <p:spPr>
-          <a:xfrm>
-            <a:off x="5138928" y="4663440"/>
-            <a:ext cx="960120" cy="868680"/>
-          </a:xfrm>
-          <a:prstGeom prst="rect">
-            <a:avLst/>
-          </a:prstGeom>
-          <a:noFill/>
-          <a:ln w="38100">
-            <a:noFill/>
-          </a:ln>
-        </p:spPr>
-        <p:txBody>
-          <a:bodyPr wrap="square" lIns="18288" tIns="36576" rIns="18288" bIns="36576" rtlCol="0" anchor="ctr">
-            <a:noAutofit/>
-          </a:bodyPr>
-          <a:lstStyle/>
-          <a:p>
-            <a:pPr algn="ctr" indent="0" marL="0">
-              <a:buNone/>
-            </a:pPr>
-            <a:r>
-              <a:rPr lang="en-US" sz="2600" dirty="0" b="1">
-                <a:solidFill>
-                  <a:srgbClr val="1B2236"/>
-                </a:solidFill>
-                <a:latin typeface="Lexend Deca" pitchFamily="34" charset="0"/>
-                <a:ea typeface="Lexend Deca" pitchFamily="34" charset="-122"/>
-                <a:cs typeface="Lexend Deca" pitchFamily="34" charset="-120"/>
-              </a:rPr>
-              <a:t>Do</a:t>
-            </a:r>
-            <a:endParaRPr lang="en-US" sz="2600" dirty="0"/>
-          </a:p>
-        </p:txBody>
-      </p:sp>
-      <p:sp>
-        <p:nvSpPr>
-          <p:cNvPr id="52" name="Question"/>
-          <p:cNvSpPr/>
-          <p:nvPr/>
-        </p:nvSpPr>
-        <p:spPr>
-          <a:xfrm>
-            <a:off x="6144768" y="4663440"/>
-            <a:ext cx="2487168" cy="868680"/>
-          </a:xfrm>
-          <a:prstGeom prst="rect">
-            <a:avLst/>
-          </a:prstGeom>
-          <a:noFill/>
-          <a:ln w="38100">
-            <a:noFill/>
-          </a:ln>
-        </p:spPr>
-        <p:txBody>
-          <a:bodyPr wrap="square" lIns="73152" tIns="36576" rIns="73152" bIns="36576" rtlCol="0" anchor="ctr">
-            <a:noAutofit/>
-          </a:bodyPr>
-          <a:lstStyle/>
-          <a:p>
-            <a:pPr algn="l" indent="0" marL="0">
-              <a:buNone/>
-            </a:pPr>
-            <a:r>
-              <a:rPr lang="en-US" sz="2200" dirty="0">
-                <a:solidFill>
-                  <a:srgbClr val="1B2236"/>
-                </a:solidFill>
-                <a:latin typeface="Lexend Deca" pitchFamily="34" charset="0"/>
-                <a:ea typeface="Lexend Deca" pitchFamily="34" charset="-122"/>
-                <a:cs typeface="Lexend Deca" pitchFamily="34" charset="-120"/>
-              </a:rPr>
-              <a:t>we need to fill out a form?</a:t>
-            </a:r>
-            <a:endParaRPr lang="en-US" sz="2200" dirty="0"/>
-          </a:p>
-        </p:txBody>
-      </p:sp>
-      <p:sp>
-        <p:nvSpPr>
-          <p:cNvPr id="54" name="Answer bg"/>
-          <p:cNvSpPr/>
-          <p:nvPr/>
-        </p:nvSpPr>
-        <p:spPr>
-          <a:xfrm>
-            <a:off x="8668512" y="4663440"/>
-            <a:ext cx="3017520" cy="868680"/>
-          </a:xfrm>
-          <a:prstGeom prst="roundRect">
-            <a:avLst>
-              <a:gd name="adj" fmla="val 22000"/>
-            </a:avLst>
-          </a:prstGeom>
-          <a:solidFill>
-            <a:srgbClr val="C9B8F2"/>
-          </a:solidFill>
-          <a:ln w="38100">
-            <a:noFill/>
-          </a:ln>
-        </p:spPr>
-        <p:txBody>
-          <a:bodyPr wrap="square" lIns="73152" tIns="36576" rIns="73152" bIns="36576" rtlCol="0" anchor="ctr">
-            <a:noAutofit/>
-          </a:bodyPr>
-          <a:lstStyle/>
-          <a:p>
-            <a:pPr algn="l" indent="0" marL="0">
-              <a:buNone/>
-            </a:pPr>
-            <a:r>
-              <a:rPr lang="en-US" sz="2000" dirty="0">
-                <a:solidFill>
-                  <a:srgbClr val="1B2236"/>
-                </a:solidFill>
-                <a:latin typeface="Lexend Deca" pitchFamily="34" charset="0"/>
-                <a:ea typeface="Lexend Deca" pitchFamily="34" charset="-122"/>
-                <a:cs typeface="Lexend Deca" pitchFamily="34" charset="-120"/>
-              </a:rPr>
-              <a:t/>
-            </a:r>
-            <a:endParaRPr lang="en-US" sz="2000" dirty="0"/>
-          </a:p>
-        </p:txBody>
-      </p:sp>
-      <p:sp>
-        <p:nvSpPr>
-          <p:cNvPr id="53" name="Answer"/>
-          <p:cNvSpPr/>
-          <p:nvPr/>
-        </p:nvSpPr>
-        <p:spPr>
-          <a:xfrm>
-            <a:off x="8668512" y="4663440"/>
-            <a:ext cx="3017520" cy="868680"/>
-          </a:xfrm>
-          <a:prstGeom prst="rect">
-            <a:avLst/>
-          </a:prstGeom>
-          <a:noFill/>
-          <a:ln w="38100">
-            <a:noFill/>
-          </a:ln>
-        </p:spPr>
-        <p:txBody>
-          <a:bodyPr wrap="square" lIns="73152" tIns="36576" rIns="73152" bIns="36576" rtlCol="0" anchor="ctr">
-            <a:noAutofit/>
-          </a:bodyPr>
-          <a:lstStyle/>
-          <a:p>
-            <a:pPr algn="l" indent="0" marL="0">
-              <a:buNone/>
-            </a:pPr>
-            <a:r>
-              <a:rPr lang="en-US" sz="2200" dirty="0">
-                <a:solidFill>
-                  <a:srgbClr val="1B2236"/>
-                </a:solidFill>
-                <a:latin typeface="Lexend Deca" pitchFamily="34" charset="0"/>
-                <a:ea typeface="Lexend Deca" pitchFamily="34" charset="-122"/>
-                <a:cs typeface="Lexend Deca" pitchFamily="34" charset="-120"/>
-              </a:rPr>
-              <a:t>Yes, you </a:t>
-            </a:r>
-            <a:r>
-              <a:rPr lang="en-US" sz="2200" dirty="0" b="1">
-                <a:solidFill>
-                  <a:srgbClr val="1B2236"/>
-                </a:solidFill>
-                <a:latin typeface="Lexend Deca" pitchFamily="34" charset="0"/>
-                <a:ea typeface="Lexend Deca" pitchFamily="34" charset="-122"/>
-                <a:cs typeface="Lexend Deca" pitchFamily="34" charset="-120"/>
-              </a:rPr>
-              <a:t>do</a:t>
-            </a:r>
-            <a:r>
-              <a:rPr lang="en-US" sz="2200" dirty="0">
-                <a:solidFill>
-                  <a:srgbClr val="1B2236"/>
-                </a:solidFill>
-                <a:latin typeface="Lexend Deca" pitchFamily="34" charset="0"/>
-                <a:ea typeface="Lexend Deca" pitchFamily="34" charset="-122"/>
-                <a:cs typeface="Lexend Deca" pitchFamily="34" charset="-120"/>
-              </a:rPr>
-              <a:t>.</a:t>
-            </a:r>
-            <a:endParaRPr lang="en-US" sz="2200" dirty="0"/>
-          </a:p>
-          <a:p>
-            <a:pPr algn="l" indent="0" marL="0">
-              <a:buNone/>
-            </a:pPr>
-            <a:r>
-              <a:rPr lang="en-US" sz="2200" dirty="0">
-                <a:solidFill>
-                  <a:srgbClr val="1B2236"/>
-                </a:solidFill>
-                <a:latin typeface="Lexend Deca" pitchFamily="34" charset="0"/>
-                <a:ea typeface="Lexend Deca" pitchFamily="34" charset="-122"/>
-                <a:cs typeface="Lexend Deca" pitchFamily="34" charset="-120"/>
-              </a:rPr>
-              <a:t>No, you </a:t>
-            </a:r>
-            <a:r>
-              <a:rPr lang="en-US" sz="2200" dirty="0" b="1">
-                <a:solidFill>
-                  <a:srgbClr val="1B2236"/>
-                </a:solidFill>
-                <a:latin typeface="Lexend Deca" pitchFamily="34" charset="0"/>
-                <a:ea typeface="Lexend Deca" pitchFamily="34" charset="-122"/>
-                <a:cs typeface="Lexend Deca" pitchFamily="34" charset="-120"/>
-              </a:rPr>
-              <a:t>don't</a:t>
-            </a:r>
-            <a:r>
-              <a:rPr lang="en-US" sz="2200" dirty="0">
-                <a:solidFill>
-                  <a:srgbClr val="1B2236"/>
-                </a:solidFill>
-                <a:latin typeface="Lexend Deca" pitchFamily="34" charset="0"/>
-                <a:ea typeface="Lexend Deca" pitchFamily="34" charset="-122"/>
-                <a:cs typeface="Lexend Deca" pitchFamily="34" charset="-120"/>
-              </a:rPr>
-              <a:t>.</a:t>
-            </a:r>
-            <a:endParaRPr lang="en-US" sz="2200" dirty="0"/>
-          </a:p>
-        </p:txBody>
-      </p:sp>
-      <p:sp>
-        <p:nvSpPr>
-          <p:cNvPr id="55" name="Highlight"/>
-          <p:cNvSpPr/>
-          <p:nvPr/>
-        </p:nvSpPr>
-        <p:spPr>
-          <a:xfrm>
-            <a:off x="5138928" y="5728716"/>
-            <a:ext cx="960120" cy="566928"/>
-          </a:xfrm>
-          <a:prstGeom prst="roundRect">
-            <a:avLst>
-              <a:gd name="adj" fmla="val 22000"/>
-            </a:avLst>
-          </a:prstGeom>
-          <a:solidFill>
-            <a:srgbClr val="FFE28C"/>
-          </a:solidFill>
-          <a:ln w="38100">
-            <a:noFill/>
-          </a:ln>
-        </p:spPr>
-        <p:txBody>
-          <a:bodyPr wrap="square" lIns="73152" tIns="36576" rIns="73152" bIns="36576" rtlCol="0" anchor="ctr">
-            <a:noAutofit/>
-          </a:bodyPr>
-          <a:lstStyle/>
-          <a:p>
-            <a:pPr algn="l" indent="0" marL="0">
-              <a:buNone/>
-            </a:pPr>
-            <a:r>
-              <a:rPr lang="en-US" sz="2000" dirty="0">
-                <a:solidFill>
-                  <a:srgbClr val="1B2236"/>
-                </a:solidFill>
-                <a:latin typeface="Lexend Deca" pitchFamily="34" charset="0"/>
-                <a:ea typeface="Lexend Deca" pitchFamily="34" charset="-122"/>
-                <a:cs typeface="Lexend Deca" pitchFamily="34" charset="-120"/>
-              </a:rPr>
-              <a:t/>
-            </a:r>
-            <a:endParaRPr lang="en-US" sz="2000" dirty="0"/>
-          </a:p>
-        </p:txBody>
-      </p:sp>
-      <p:sp>
-        <p:nvSpPr>
-          <p:cNvPr id="56" name="Helper"/>
-          <p:cNvSpPr/>
-          <p:nvPr/>
-        </p:nvSpPr>
-        <p:spPr>
-          <a:xfrm>
-            <a:off x="5138928" y="5577840"/>
-            <a:ext cx="960120" cy="868680"/>
-          </a:xfrm>
-          <a:prstGeom prst="rect">
-            <a:avLst/>
-          </a:prstGeom>
-          <a:noFill/>
-          <a:ln w="38100">
-            <a:noFill/>
-          </a:ln>
-        </p:spPr>
-        <p:txBody>
-          <a:bodyPr wrap="square" lIns="18288" tIns="36576" rIns="18288" bIns="36576" rtlCol="0" anchor="ctr">
-            <a:noAutofit/>
-          </a:bodyPr>
-          <a:lstStyle/>
-          <a:p>
-            <a:pPr algn="ctr" indent="0" marL="0">
-              <a:buNone/>
-            </a:pPr>
-            <a:r>
-              <a:rPr lang="en-US" sz="2600" dirty="0" b="1">
-                <a:solidFill>
-                  <a:srgbClr val="1B2236"/>
-                </a:solidFill>
-                <a:latin typeface="Lexend Deca" pitchFamily="34" charset="0"/>
-                <a:ea typeface="Lexend Deca" pitchFamily="34" charset="-122"/>
-                <a:cs typeface="Lexend Deca" pitchFamily="34" charset="-120"/>
-              </a:rPr>
-              <a:t>Does</a:t>
-            </a:r>
-            <a:endParaRPr lang="en-US" sz="2600" dirty="0"/>
-          </a:p>
-        </p:txBody>
-      </p:sp>
-      <p:sp>
-        <p:nvSpPr>
-          <p:cNvPr id="57" name="Question"/>
-          <p:cNvSpPr/>
-          <p:nvPr/>
-        </p:nvSpPr>
-        <p:spPr>
-          <a:xfrm>
-            <a:off x="6144768" y="5577840"/>
-            <a:ext cx="2487168" cy="868680"/>
-          </a:xfrm>
-          <a:prstGeom prst="rect">
-            <a:avLst/>
-          </a:prstGeom>
-          <a:noFill/>
-          <a:ln w="38100">
-            <a:noFill/>
-          </a:ln>
-        </p:spPr>
-        <p:txBody>
-          <a:bodyPr wrap="square" lIns="73152" tIns="36576" rIns="73152" bIns="36576" rtlCol="0" anchor="ctr">
-            <a:noAutofit/>
-          </a:bodyPr>
-          <a:lstStyle/>
-          <a:p>
-            <a:pPr algn="l" indent="0" marL="0">
-              <a:buNone/>
-            </a:pPr>
-            <a:r>
-              <a:rPr lang="en-US" sz="2200" dirty="0">
-                <a:solidFill>
-                  <a:srgbClr val="1B2236"/>
-                </a:solidFill>
-                <a:latin typeface="Lexend Deca" pitchFamily="34" charset="0"/>
-                <a:ea typeface="Lexend Deca" pitchFamily="34" charset="-122"/>
-                <a:cs typeface="Lexend Deca" pitchFamily="34" charset="-120"/>
-              </a:rPr>
-              <a:t>she have to work?</a:t>
-            </a:r>
-            <a:endParaRPr lang="en-US" sz="2200" dirty="0"/>
-          </a:p>
-        </p:txBody>
-      </p:sp>
-      <p:sp>
-        <p:nvSpPr>
-          <p:cNvPr id="59" name="Answer bg"/>
-          <p:cNvSpPr/>
-          <p:nvPr/>
-        </p:nvSpPr>
-        <p:spPr>
-          <a:xfrm>
-            <a:off x="8668512" y="5577840"/>
-            <a:ext cx="3017520" cy="868680"/>
-          </a:xfrm>
-          <a:prstGeom prst="roundRect">
-            <a:avLst>
-              <a:gd name="adj" fmla="val 22000"/>
-            </a:avLst>
-          </a:prstGeom>
-          <a:solidFill>
-            <a:srgbClr val="C9B8F2"/>
-          </a:solidFill>
-          <a:ln w="38100">
-            <a:noFill/>
-          </a:ln>
-        </p:spPr>
-        <p:txBody>
-          <a:bodyPr wrap="square" lIns="73152" tIns="36576" rIns="73152" bIns="36576" rtlCol="0" anchor="ctr">
-            <a:noAutofit/>
-          </a:bodyPr>
-          <a:lstStyle/>
-          <a:p>
-            <a:pPr algn="l" indent="0" marL="0">
-              <a:buNone/>
-            </a:pPr>
-            <a:r>
-              <a:rPr lang="en-US" sz="2000" dirty="0">
-                <a:solidFill>
-                  <a:srgbClr val="1B2236"/>
-                </a:solidFill>
-                <a:latin typeface="Lexend Deca" pitchFamily="34" charset="0"/>
-                <a:ea typeface="Lexend Deca" pitchFamily="34" charset="-122"/>
-                <a:cs typeface="Lexend Deca" pitchFamily="34" charset="-120"/>
-              </a:rPr>
-              <a:t/>
-            </a:r>
-            <a:endParaRPr lang="en-US" sz="2000" dirty="0"/>
-          </a:p>
-        </p:txBody>
-      </p:sp>
-      <p:sp>
-        <p:nvSpPr>
-          <p:cNvPr id="58" name="Answer"/>
-          <p:cNvSpPr/>
-          <p:nvPr/>
-        </p:nvSpPr>
-        <p:spPr>
-          <a:xfrm>
-            <a:off x="8668512" y="5577840"/>
-            <a:ext cx="3017520" cy="868680"/>
-          </a:xfrm>
-          <a:prstGeom prst="rect">
-            <a:avLst/>
-          </a:prstGeom>
-          <a:noFill/>
-          <a:ln w="38100">
-            <a:noFill/>
-          </a:ln>
-        </p:spPr>
-        <p:txBody>
-          <a:bodyPr wrap="square" lIns="73152" tIns="36576" rIns="73152" bIns="36576" rtlCol="0" anchor="ctr">
-            <a:noAutofit/>
-          </a:bodyPr>
-          <a:lstStyle/>
-          <a:p>
-            <a:pPr algn="l" indent="0" marL="0">
-              <a:buNone/>
-            </a:pPr>
-            <a:r>
-              <a:rPr lang="en-US" sz="2200" dirty="0">
-                <a:solidFill>
-                  <a:srgbClr val="1B2236"/>
-                </a:solidFill>
-                <a:latin typeface="Lexend Deca" pitchFamily="34" charset="0"/>
-                <a:ea typeface="Lexend Deca" pitchFamily="34" charset="-122"/>
-                <a:cs typeface="Lexend Deca" pitchFamily="34" charset="-120"/>
-              </a:rPr>
-              <a:t>Yes, she </a:t>
-            </a:r>
-            <a:r>
-              <a:rPr lang="en-US" sz="2200" dirty="0" b="1">
-                <a:solidFill>
-                  <a:srgbClr val="1B2236"/>
-                </a:solidFill>
-                <a:latin typeface="Lexend Deca" pitchFamily="34" charset="0"/>
-                <a:ea typeface="Lexend Deca" pitchFamily="34" charset="-122"/>
-                <a:cs typeface="Lexend Deca" pitchFamily="34" charset="-120"/>
-              </a:rPr>
-              <a:t>does</a:t>
-            </a:r>
-            <a:r>
-              <a:rPr lang="en-US" sz="2200" dirty="0">
-                <a:solidFill>
-                  <a:srgbClr val="1B2236"/>
-                </a:solidFill>
-                <a:latin typeface="Lexend Deca" pitchFamily="34" charset="0"/>
-                <a:ea typeface="Lexend Deca" pitchFamily="34" charset="-122"/>
-                <a:cs typeface="Lexend Deca" pitchFamily="34" charset="-120"/>
-              </a:rPr>
-              <a:t>.</a:t>
-            </a:r>
-            <a:endParaRPr lang="en-US" sz="2200" dirty="0"/>
-          </a:p>
-          <a:p>
-            <a:pPr algn="l" indent="0" marL="0">
-              <a:buNone/>
-            </a:pPr>
-            <a:r>
-              <a:rPr lang="en-US" sz="2200" dirty="0">
-                <a:solidFill>
-                  <a:srgbClr val="1B2236"/>
-                </a:solidFill>
-                <a:latin typeface="Lexend Deca" pitchFamily="34" charset="0"/>
-                <a:ea typeface="Lexend Deca" pitchFamily="34" charset="-122"/>
-                <a:cs typeface="Lexend Deca" pitchFamily="34" charset="-120"/>
-              </a:rPr>
-              <a:t>No, she </a:t>
-            </a:r>
-            <a:r>
-              <a:rPr lang="en-US" sz="2200" dirty="0" b="1">
-                <a:solidFill>
-                  <a:srgbClr val="1B2236"/>
-                </a:solidFill>
-                <a:latin typeface="Lexend Deca" pitchFamily="34" charset="0"/>
-                <a:ea typeface="Lexend Deca" pitchFamily="34" charset="-122"/>
-                <a:cs typeface="Lexend Deca" pitchFamily="34" charset="-120"/>
-              </a:rPr>
-              <a:t>doesn't</a:t>
-            </a:r>
-            <a:r>
-              <a:rPr lang="en-US" sz="2200" dirty="0">
-                <a:solidFill>
-                  <a:srgbClr val="1B2236"/>
-                </a:solidFill>
-                <a:latin typeface="Lexend Deca" pitchFamily="34" charset="0"/>
-                <a:ea typeface="Lexend Deca" pitchFamily="34" charset="-122"/>
-                <a:cs typeface="Lexend Deca" pitchFamily="34" charset="-120"/>
-              </a:rPr>
-              <a:t>.</a:t>
-            </a:r>
-            <a:endParaRPr lang="en-US" sz="2200" dirty="0"/>
-          </a:p>
-        </p:txBody>
-      </p:sp>
-    </p:spTree>
-  </p:cSld>
-  <p:clrMapOvr>
-    <a:masterClrMapping/>
-  </p:clrMapOvr>
-  <p:timing>
-    <p:tnLst>
-      <p:par>
-        <p:cTn id="1" dur="indefinite" restart="never" nodeType="tmRoot">
-          <p:childTnLst>
-            <p:seq concurrent="1" nextAc="seek">
-              <p:cTn id="2" dur="indefinite" nodeType="mainSeq">
-                <p:childTnLst>
-                  <p:par>
-                    <p:cTn id="3" fill="hold">
-                      <p:stCondLst>
-                        <p:cond delay="indefinite"/>
-                      </p:stCondLst>
-                      <p:childTnLst>
-                        <p:par>
-                          <p:cTn id="4" fill="hold">
-                            <p:stCondLst>
-                              <p:cond delay="0"/>
-                            </p:stCondLst>
-                            <p:childTnLst>
-                              <p:par>
-                                <p:cTn id="5" presetID="10" presetClass="entr" presetSubtype="0" fill="hold" nodeType="clickEffect">
-                                  <p:stCondLst>
-                                    <p:cond delay="0"/>
-                                  </p:stCondLst>
-                                  <p:childTnLst>
-                                    <p:set>
-                                      <p:cBhvr>
-                                        <p:cTn id="6" dur="1" fill="hold">
-                                          <p:stCondLst>
-                                            <p:cond delay="0"/>
-                                          </p:stCondLst>
-                                        </p:cTn>
-                                        <p:tgtEl>
-                                          <p:spTgt spid="45"/>
-                                        </p:tgtEl>
-                                        <p:attrNameLst>
-                                          <p:attrName>style.visibility</p:attrName>
-                                        </p:attrNameLst>
-                                      </p:cBhvr>
-                                      <p:to>
-                                        <p:strVal val="visible"/>
-                                      </p:to>
-                                    </p:set>
-                                    <p:animEffect transition="in" filter="fade">
-                                      <p:cBhvr>
-                                        <p:cTn id="7" dur="400"/>
-                                        <p:tgtEl>
-                                          <p:spTgt spid="45"/>
-                                        </p:tgtEl>
-                                      </p:cBhvr>
-                                    </p:animEffect>
-                                  </p:childTnLst>
-                                </p:cTn>
-                              </p:par>
-                              <p:par>
-                                <p:cTn id="8" presetID="10" presetClass="entr" presetSubtype="0" fill="hold" nodeType="withEffect">
-                                  <p:stCondLst>
-                                    <p:cond delay="0"/>
-                                  </p:stCondLst>
-                                  <p:childTnLst>
-                                    <p:set>
-                                      <p:cBhvr>
-                                        <p:cTn id="9" dur="1" fill="hold">
-                                          <p:stCondLst>
-                                            <p:cond delay="0"/>
-                                          </p:stCondLst>
-                                        </p:cTn>
-                                        <p:tgtEl>
-                                          <p:spTgt spid="49"/>
-                                        </p:tgtEl>
-                                        <p:attrNameLst>
-                                          <p:attrName>style.visibility</p:attrName>
-                                        </p:attrNameLst>
-                                      </p:cBhvr>
-                                      <p:to>
-                                        <p:strVal val="visible"/>
-                                      </p:to>
-                                    </p:set>
-                                    <p:animEffect transition="in" filter="fade">
-                                      <p:cBhvr>
-                                        <p:cTn id="10" dur="400"/>
-                                        <p:tgtEl>
-                                          <p:spTgt spid="49"/>
-                                        </p:tgtEl>
-                                      </p:cBhvr>
-                                    </p:animEffect>
-                                  </p:childTnLst>
-                                </p:cTn>
-                              </p:par>
-                            </p:childTnLst>
-                          </p:cTn>
-                        </p:par>
-                      </p:childTnLst>
-                    </p:cTn>
-                  </p:par>
-                  <p:par>
-                    <p:cTn id="11" fill="hold">
-                      <p:stCondLst>
-                        <p:cond delay="indefinite"/>
-                      </p:stCondLst>
-                      <p:childTnLst>
-                        <p:par>
-                          <p:cTn id="12" fill="hold">
-                            <p:stCondLst>
-                              <p:cond delay="0"/>
-                            </p:stCondLst>
-                            <p:childTnLst>
-                              <p:par>
-                                <p:cTn id="13" presetID="10" presetClass="entr" presetSubtype="0" fill="hold" nodeType="clickEffect">
-                                  <p:stCondLst>
-                                    <p:cond delay="0"/>
-                                  </p:stCondLst>
-                                  <p:childTnLst>
-                                    <p:set>
-                                      <p:cBhvr>
-                                        <p:cTn id="14" dur="1" fill="hold">
-                                          <p:stCondLst>
-                                            <p:cond delay="0"/>
-                                          </p:stCondLst>
-                                        </p:cTn>
-                                        <p:tgtEl>
-                                          <p:spTgt spid="50"/>
-                                        </p:tgtEl>
-                                        <p:attrNameLst>
-                                          <p:attrName>style.visibility</p:attrName>
-                                        </p:attrNameLst>
-                                      </p:cBhvr>
-                                      <p:to>
-                                        <p:strVal val="visible"/>
-                                      </p:to>
-                                    </p:set>
-                                    <p:animEffect transition="in" filter="fade">
-                                      <p:cBhvr>
-                                        <p:cTn id="15" dur="400"/>
-                                        <p:tgtEl>
-                                          <p:spTgt spid="50"/>
-                                        </p:tgtEl>
-                                      </p:cBhvr>
-                                    </p:animEffect>
-                                  </p:childTnLst>
-                                </p:cTn>
-                              </p:par>
-                              <p:par>
-                                <p:cTn id="16" presetID="10" presetClass="entr" presetSubtype="0" fill="hold" nodeType="withEffect">
-                                  <p:stCondLst>
-                                    <p:cond delay="0"/>
-                                  </p:stCondLst>
-                                  <p:childTnLst>
-                                    <p:set>
-                                      <p:cBhvr>
-                                        <p:cTn id="17" dur="1" fill="hold">
-                                          <p:stCondLst>
-                                            <p:cond delay="0"/>
-                                          </p:stCondLst>
-                                        </p:cTn>
-                                        <p:tgtEl>
-                                          <p:spTgt spid="54"/>
-                                        </p:tgtEl>
-                                        <p:attrNameLst>
-                                          <p:attrName>style.visibility</p:attrName>
-                                        </p:attrNameLst>
-                                      </p:cBhvr>
-                                      <p:to>
-                                        <p:strVal val="visible"/>
-                                      </p:to>
-                                    </p:set>
-                                    <p:animEffect transition="in" filter="fade">
-                                      <p:cBhvr>
-                                        <p:cTn id="18" dur="400"/>
-                                        <p:tgtEl>
-                                          <p:spTgt spid="54"/>
-                                        </p:tgtEl>
-                                      </p:cBhvr>
-                                    </p:animEffect>
-                                  </p:childTnLst>
-                                </p:cTn>
-                              </p:par>
-                            </p:childTnLst>
-                          </p:cTn>
-                        </p:par>
-                      </p:childTnLst>
-                    </p:cTn>
-                  </p:par>
-                  <p:par>
-                    <p:cTn id="19" fill="hold">
-                      <p:stCondLst>
-                        <p:cond delay="indefinite"/>
-                      </p:stCondLst>
-                      <p:childTnLst>
-                        <p:par>
-                          <p:cTn id="20" fill="hold">
-                            <p:stCondLst>
-                              <p:cond delay="0"/>
-                            </p:stCondLst>
-                            <p:childTnLst>
-                              <p:par>
-                                <p:cTn id="21" presetID="10" presetClass="entr" presetSubtype="0" fill="hold" nodeType="clickEffect">
-                                  <p:stCondLst>
-                                    <p:cond delay="0"/>
-                                  </p:stCondLst>
-                                  <p:childTnLst>
-                                    <p:set>
-                                      <p:cBhvr>
-                                        <p:cTn id="22" dur="1" fill="hold">
-                                          <p:stCondLst>
-                                            <p:cond delay="0"/>
-                                          </p:stCondLst>
-                                        </p:cTn>
-                                        <p:tgtEl>
-                                          <p:spTgt spid="55"/>
-                                        </p:tgtEl>
-                                        <p:attrNameLst>
-                                          <p:attrName>style.visibility</p:attrName>
-                                        </p:attrNameLst>
-                                      </p:cBhvr>
-                                      <p:to>
-                                        <p:strVal val="visible"/>
-                                      </p:to>
-                                    </p:set>
-                                    <p:animEffect transition="in" filter="fade">
-                                      <p:cBhvr>
-                                        <p:cTn id="23" dur="400"/>
-                                        <p:tgtEl>
-                                          <p:spTgt spid="55"/>
-                                        </p:tgtEl>
-                                      </p:cBhvr>
-                                    </p:animEffect>
-                                  </p:childTnLst>
-                                </p:cTn>
-                              </p:par>
-                              <p:par>
-                                <p:cTn id="24" presetID="10" presetClass="entr" presetSubtype="0" fill="hold" nodeType="withEffect">
-                                  <p:stCondLst>
-                                    <p:cond delay="0"/>
-                                  </p:stCondLst>
-                                  <p:childTnLst>
-                                    <p:set>
-                                      <p:cBhvr>
-                                        <p:cTn id="25" dur="1" fill="hold">
-                                          <p:stCondLst>
-                                            <p:cond delay="0"/>
-                                          </p:stCondLst>
-                                        </p:cTn>
-                                        <p:tgtEl>
-                                          <p:spTgt spid="59"/>
-                                        </p:tgtEl>
-                                        <p:attrNameLst>
-                                          <p:attrName>style.visibility</p:attrName>
-                                        </p:attrNameLst>
-                                      </p:cBhvr>
-                                      <p:to>
-                                        <p:strVal val="visible"/>
-                                      </p:to>
-                                    </p:set>
-                                    <p:animEffect transition="in" filter="fade">
-                                      <p:cBhvr>
-                                        <p:cTn id="26" dur="400"/>
-                                        <p:tgtEl>
-                                          <p:spTgt spid="59"/>
-                                        </p:tgtEl>
-                                      </p:cBhvr>
-                                    </p:animEffect>
-                                  </p:childTnLst>
-                                </p:cTn>
-                              </p:par>
-                            </p:childTnLst>
-                          </p:cTn>
-                        </p:par>
-                      </p:childTnLst>
-                    </p:cTn>
-                  </p:par>
-                </p:childTnLst>
-              </p:cTn>
-              <p:prevCondLst>
-                <p:cond evt="onPrev" delay="0">
-                  <p:tgtEl>
-                    <p:sldTgt/>
-                  </p:tgtEl>
-                </p:cond>
-              </p:prevCondLst>
-              <p:nextCondLst>
-                <p:cond evt="onNext" delay="0">
-                  <p:tgtEl>
-                    <p:sldTgt/>
-                  </p:tgtEl>
-                </p:cond>
-              </p:nextCondLst>
-            </p:seq>
-          </p:childTnLst>
-        </p:cTn>
-      </p:par>
-    </p:tnLst>
-  </p:timing>
-</p:sld>
-</file>
-
-<file path=ppt/slides/slide11.xml><?xml version="1.0" encoding="utf-8"?>
 <p:sld xmlns:a="http://schemas.openxmlformats.org/drawingml/2006/main" xmlns:r="http://schemas.openxmlformats.org/officeDocument/2006/relationships" xmlns:p="http://schemas.openxmlformats.org/presentationml/2006/main">
   <p:cSld name="Slide 4">
     <p:bg>
@@ -5651,6 +4154,1287 @@
                                         <p:cTn id="18" dur="400"/>
                                         <p:tgtEl>
                                           <p:spTgt spid="52"/>
+                                        </p:tgtEl>
+                                      </p:cBhvr>
+                                    </p:animEffect>
+                                  </p:childTnLst>
+                                </p:cTn>
+                              </p:par>
+                            </p:childTnLst>
+                          </p:cTn>
+                        </p:par>
+                      </p:childTnLst>
+                    </p:cTn>
+                  </p:par>
+                </p:childTnLst>
+              </p:cTn>
+              <p:prevCondLst>
+                <p:cond evt="onPrev" delay="0">
+                  <p:tgtEl>
+                    <p:sldTgt/>
+                  </p:tgtEl>
+                </p:cond>
+              </p:prevCondLst>
+              <p:nextCondLst>
+                <p:cond evt="onNext" delay="0">
+                  <p:tgtEl>
+                    <p:sldTgt/>
+                  </p:tgtEl>
+                </p:cond>
+              </p:nextCondLst>
+            </p:seq>
+          </p:childTnLst>
+        </p:cTn>
+      </p:par>
+    </p:tnLst>
+  </p:timing>
+</p:sld>
+</file>
+
+<file path=ppt/slides/slide11.xml><?xml version="1.0" encoding="utf-8"?>
+<p:sld xmlns:a="http://schemas.openxmlformats.org/drawingml/2006/main" xmlns:r="http://schemas.openxmlformats.org/officeDocument/2006/relationships" xmlns:p="http://schemas.openxmlformats.org/presentationml/2006/main">
+  <p:cSld name="Slide 9">
+    <p:bg>
+      <p:bgPr>
+        <a:solidFill>
+          <a:srgbClr val="F1F5FB"/>
+        </a:solidFill>
+      </p:bgPr>
+    </p:bg>
+    <p:spTree>
+      <p:nvGrpSpPr>
+        <p:cNvPr id="1" name=""/>
+        <p:cNvGrpSpPr/>
+        <p:nvPr/>
+      </p:nvGrpSpPr>
+      <p:grpSpPr>
+        <a:xfrm>
+          <a:off x="0" y="0"/>
+          <a:ext cx="0" cy="0"/>
+          <a:chOff x="0" y="0"/>
+          <a:chExt cx="0" cy="0"/>
+        </a:xfrm>
+      </p:grpSpPr>
+      <p:sp>
+        <p:nvSpPr>
+          <p:cNvPr id="2" name="Shape 0"/>
+          <p:cNvSpPr/>
+          <p:nvPr/>
+        </p:nvSpPr>
+        <p:spPr>
+          <a:xfrm>
+            <a:off x="0" y="0"/>
+            <a:ext cx="3063240" cy="6858000"/>
+          </a:xfrm>
+          <a:prstGeom prst="rect">
+            <a:avLst/>
+          </a:prstGeom>
+          <a:solidFill>
+            <a:srgbClr val="B9D2F7"/>
+          </a:solidFill>
+          <a:ln/>
+        </p:spPr>
+        <p:txBody>
+          <a:bodyPr/>
+          <a:p/>
+        </p:txBody>
+      </p:sp>
+      <p:sp>
+        <p:nvSpPr>
+          <p:cNvPr id="4" name="Shape 2"/>
+          <p:cNvSpPr/>
+          <p:nvPr/>
+        </p:nvSpPr>
+        <p:spPr>
+          <a:xfrm>
+            <a:off x="8156448" y="1289304"/>
+            <a:ext cx="3429000" cy="4983480"/>
+          </a:xfrm>
+          <a:prstGeom prst="round1Rect">
+            <a:avLst>
+              <a:gd name="adj" fmla="val 23087"/>
+            </a:avLst>
+          </a:prstGeom>
+          <a:solidFill>
+            <a:srgbClr val="8FAFE3"/>
+          </a:solidFill>
+          <a:ln/>
+        </p:spPr>
+        <p:txBody>
+          <a:bodyPr/>
+          <a:p/>
+        </p:txBody>
+      </p:sp>
+      <p:sp>
+        <p:nvSpPr>
+          <p:cNvPr id="5" name="Shape 3"/>
+          <p:cNvSpPr/>
+          <p:nvPr/>
+        </p:nvSpPr>
+        <p:spPr>
+          <a:xfrm>
+            <a:off x="8321040" y="1097280"/>
+            <a:ext cx="3429000" cy="4983480"/>
+          </a:xfrm>
+          <a:prstGeom prst="round1Rect">
+            <a:avLst>
+              <a:gd name="adj" fmla="val 23087"/>
+            </a:avLst>
+          </a:prstGeom>
+          <a:solidFill>
+            <a:srgbClr val="B9D2F7"/>
+          </a:solidFill>
+          <a:ln/>
+        </p:spPr>
+        <p:txBody>
+          <a:bodyPr/>
+          <a:p/>
+        </p:txBody>
+      </p:sp>
+      <p:sp>
+        <p:nvSpPr>
+          <p:cNvPr id="6" name="Shape 4"/>
+          <p:cNvSpPr/>
+          <p:nvPr/>
+        </p:nvSpPr>
+        <p:spPr>
+          <a:xfrm>
+            <a:off x="3394847" y="1032586"/>
+            <a:ext cx="4424782" cy="1863547"/>
+          </a:xfrm>
+          <a:prstGeom prst="roundRect">
+            <a:avLst>
+              <a:gd name="adj" fmla="val 16667"/>
+            </a:avLst>
+          </a:prstGeom>
+          <a:solidFill>
+            <a:srgbClr val="8FAFE3"/>
+          </a:solidFill>
+          <a:ln/>
+        </p:spPr>
+        <p:txBody>
+          <a:bodyPr/>
+          <a:p/>
+        </p:txBody>
+      </p:sp>
+      <p:sp>
+        <p:nvSpPr>
+          <p:cNvPr id="7" name="Shape 5"/>
+          <p:cNvSpPr/>
+          <p:nvPr/>
+        </p:nvSpPr>
+        <p:spPr>
+          <a:xfrm>
+            <a:off x="3420770" y="956462"/>
+            <a:ext cx="4424782" cy="1863547"/>
+          </a:xfrm>
+          <a:prstGeom prst="roundRect">
+            <a:avLst>
+              <a:gd name="adj" fmla="val 16667"/>
+            </a:avLst>
+          </a:prstGeom>
+          <a:solidFill>
+            <a:srgbClr val="FFFFFF"/>
+          </a:solidFill>
+          <a:ln/>
+        </p:spPr>
+        <p:txBody>
+          <a:bodyPr/>
+          <a:p/>
+        </p:txBody>
+      </p:sp>
+      <p:sp>
+        <p:nvSpPr>
+          <p:cNvPr id="8" name="Text 6"/>
+          <p:cNvSpPr/>
+          <p:nvPr/>
+        </p:nvSpPr>
+        <p:spPr>
+          <a:xfrm>
+            <a:off x="3566160" y="1078992"/>
+            <a:ext cx="4114800" cy="749808"/>
+          </a:xfrm>
+          <a:prstGeom prst="rect">
+            <a:avLst/>
+          </a:prstGeom>
+          <a:noFill/>
+          <a:ln/>
+        </p:spPr>
+        <p:txBody>
+          <a:bodyPr wrap="square" rtlCol="0" anchor="ctr"/>
+          <a:lstStyle/>
+          <a:p>
+            <a:pPr algn="l" indent="0" marL="0">
+              <a:buNone/>
+            </a:pPr>
+            <a:r>
+              <a:rPr lang="en-US" sz="4400" dirty="0" b="1">
+                <a:solidFill>
+                  <a:srgbClr val="1B2236"/>
+                </a:solidFill>
+                <a:latin typeface="Lexend Deca" pitchFamily="34" charset="0"/>
+                <a:ea typeface="Lexend Deca" pitchFamily="34" charset="-122"/>
+                <a:cs typeface="Lexend Deca" pitchFamily="34" charset="-120"/>
+              </a:rPr>
+              <a:t>Can I pay</a:t>
+            </a:r>
+            <a:endParaRPr lang="en-US" sz="4400" dirty="0"/>
+          </a:p>
+        </p:txBody>
+      </p:sp>
+      <p:sp>
+        <p:nvSpPr>
+          <p:cNvPr id="9" name="Text 7"/>
+          <p:cNvSpPr/>
+          <p:nvPr/>
+        </p:nvSpPr>
+        <p:spPr>
+          <a:xfrm>
+            <a:off x="3566160" y="1828800"/>
+            <a:ext cx="4114800" cy="822960"/>
+          </a:xfrm>
+          <a:prstGeom prst="rect">
+            <a:avLst/>
+          </a:prstGeom>
+          <a:noFill/>
+          <a:ln/>
+        </p:spPr>
+        <p:txBody>
+          <a:bodyPr wrap="square" rtlCol="0" anchor="ctr"/>
+          <a:lstStyle/>
+          <a:p>
+            <a:pPr algn="l" indent="0" marL="0">
+              <a:buNone/>
+            </a:pPr>
+            <a:r>
+              <a:rPr lang="en-US" sz="4400" dirty="0" b="1">
+                <a:solidFill>
+                  <a:srgbClr val="1B2236"/>
+                </a:solidFill>
+                <a:latin typeface="Lexend Deca" pitchFamily="34" charset="0"/>
+                <a:ea typeface="Lexend Deca" pitchFamily="34" charset="-122"/>
+                <a:cs typeface="Lexend Deca" pitchFamily="34" charset="-120"/>
+              </a:rPr>
+              <a:t>by phone?</a:t>
+            </a:r>
+            <a:endParaRPr lang="en-US" sz="4400" dirty="0"/>
+          </a:p>
+        </p:txBody>
+      </p:sp>
+      <p:sp>
+        <p:nvSpPr>
+          <p:cNvPr id="10" name="Text 8"/>
+          <p:cNvSpPr/>
+          <p:nvPr/>
+        </p:nvSpPr>
+        <p:spPr>
+          <a:xfrm>
+            <a:off x="3487522" y="3108960"/>
+            <a:ext cx="4206240" cy="868680"/>
+          </a:xfrm>
+          <a:prstGeom prst="rect">
+            <a:avLst/>
+          </a:prstGeom>
+          <a:noFill/>
+          <a:ln/>
+        </p:spPr>
+        <p:txBody>
+          <a:bodyPr wrap="square" lIns="0" tIns="0" rIns="0" bIns="0" rtlCol="0" anchor="ctr"/>
+          <a:lstStyle/>
+          <a:p>
+            <a:pPr algn="l" indent="0" marL="0">
+              <a:buNone/>
+            </a:pPr>
+            <a:r>
+              <a:rPr lang="en-US" sz="2000" dirty="0">
+                <a:solidFill>
+                  <a:srgbClr val="1B2236"/>
+                </a:solidFill>
+                <a:latin typeface="Lexend Deca" pitchFamily="34" charset="0"/>
+                <a:ea typeface="Lexend Deca" pitchFamily="34" charset="-122"/>
+                <a:cs typeface="Lexend Deca" pitchFamily="34" charset="-120"/>
+              </a:rPr>
+              <a:t>Asking: </a:t>
+            </a:r>
+            <a:r>
+              <a:rPr lang="en-US" sz="2000" dirty="0" b="1">
+                <a:solidFill>
+                  <a:srgbClr val="5B3FC4"/>
+                </a:solidFill>
+                <a:latin typeface="Lexend Deca" pitchFamily="34" charset="0"/>
+                <a:ea typeface="Lexend Deca" pitchFamily="34" charset="-122"/>
+                <a:cs typeface="Lexend Deca" pitchFamily="34" charset="-120"/>
+              </a:rPr>
+              <a:t>Can I</a:t>
+            </a:r>
+            <a:r>
+              <a:rPr lang="en-US" sz="2000" dirty="0">
+                <a:solidFill>
+                  <a:srgbClr val="1B2236"/>
+                </a:solidFill>
+                <a:latin typeface="Lexend Deca" pitchFamily="34" charset="0"/>
+                <a:ea typeface="Lexend Deca" pitchFamily="34" charset="-122"/>
+                <a:cs typeface="Lexend Deca" pitchFamily="34" charset="-120"/>
+              </a:rPr>
+              <a:t> …?</a:t>
+            </a:r>
+            <a:endParaRPr lang="en-US" sz="2000" dirty="0"/>
+          </a:p>
+        </p:txBody>
+      </p:sp>
+      <p:pic>
+        <p:nvPicPr>
+          <p:cNvPr id="65" name="Picture 65" descr="L12_leave_a_message.png"/>
+          <p:cNvPicPr>
+            <a:picLocks noChangeAspect="1"/>
+          </p:cNvPicPr>
+          <p:nvPr/>
+        </p:nvPicPr>
+        <p:blipFill>
+          <a:blip r:embed="rIdQ1"/>
+          <a:stretch>
+            <a:fillRect/>
+          </a:stretch>
+        </p:blipFill>
+        <p:spPr>
+          <a:xfrm>
+            <a:off x="160020" y="2423160"/>
+            <a:ext cx="2743200" cy="1920240"/>
+          </a:xfrm>
+          <a:prstGeom prst="rect">
+            <a:avLst/>
+          </a:prstGeom>
+        </p:spPr>
+      </p:pic>
+      <p:sp>
+        <p:nvSpPr>
+          <p:cNvPr id="66" name="Wh"/>
+          <p:cNvSpPr/>
+          <p:nvPr/>
+        </p:nvSpPr>
+        <p:spPr>
+          <a:xfrm>
+            <a:off x="3520440" y="4114800"/>
+            <a:ext cx="274320" cy="530352"/>
+          </a:xfrm>
+          <a:prstGeom prst="rect">
+            <a:avLst/>
+          </a:prstGeom>
+          <a:noFill/>
+          <a:ln w="38100">
+            <a:noFill/>
+          </a:ln>
+        </p:spPr>
+        <p:txBody>
+          <a:bodyPr wrap="square" lIns="0" tIns="36576" rIns="0" bIns="36576" rtlCol="0" anchor="ctr">
+            <a:noAutofit/>
+          </a:bodyPr>
+          <a:lstStyle/>
+          <a:p>
+            <a:pPr algn="l" indent="0" marL="0">
+              <a:buNone/>
+            </a:pPr>
+            <a:r>
+              <a:rPr lang="en-US" sz="2200" dirty="0">
+                <a:solidFill>
+                  <a:srgbClr val="1B2236"/>
+                </a:solidFill>
+                <a:latin typeface="Lexend Deca" pitchFamily="34" charset="0"/>
+                <a:ea typeface="Lexend Deca" pitchFamily="34" charset="-122"/>
+                <a:cs typeface="Lexend Deca" pitchFamily="34" charset="-120"/>
+              </a:rPr>
+              <a:t/>
+            </a:r>
+            <a:endParaRPr lang="en-US" sz="2200" dirty="0"/>
+          </a:p>
+        </p:txBody>
+      </p:sp>
+      <p:sp>
+        <p:nvSpPr>
+          <p:cNvPr id="67" name="Highlight"/>
+          <p:cNvSpPr/>
+          <p:nvPr/>
+        </p:nvSpPr>
+        <p:spPr>
+          <a:xfrm>
+            <a:off x="3794760" y="4114800"/>
+            <a:ext cx="1137514" cy="530352"/>
+          </a:xfrm>
+          <a:prstGeom prst="roundRect">
+            <a:avLst>
+              <a:gd name="adj" fmla="val 22000"/>
+            </a:avLst>
+          </a:prstGeom>
+          <a:solidFill>
+            <a:srgbClr val="FFE28C"/>
+          </a:solidFill>
+          <a:ln w="38100">
+            <a:noFill/>
+          </a:ln>
+        </p:spPr>
+        <p:txBody>
+          <a:bodyPr wrap="square" lIns="73152" tIns="36576" rIns="73152" bIns="36576" rtlCol="0" anchor="ctr">
+            <a:noAutofit/>
+          </a:bodyPr>
+          <a:lstStyle/>
+          <a:p>
+            <a:pPr algn="l" indent="0" marL="0">
+              <a:buNone/>
+            </a:pPr>
+            <a:r>
+              <a:rPr lang="en-US" sz="2000" dirty="0">
+                <a:solidFill>
+                  <a:srgbClr val="1B2236"/>
+                </a:solidFill>
+                <a:latin typeface="Lexend Deca" pitchFamily="34" charset="0"/>
+                <a:ea typeface="Lexend Deca" pitchFamily="34" charset="-122"/>
+                <a:cs typeface="Lexend Deca" pitchFamily="34" charset="-120"/>
+              </a:rPr>
+              <a:t/>
+            </a:r>
+            <a:endParaRPr lang="en-US" sz="2000" dirty="0"/>
+          </a:p>
+        </p:txBody>
+      </p:sp>
+      <p:sp>
+        <p:nvSpPr>
+          <p:cNvPr id="68" name="Helper"/>
+          <p:cNvSpPr/>
+          <p:nvPr/>
+        </p:nvSpPr>
+        <p:spPr>
+          <a:xfrm>
+            <a:off x="3794760" y="4114800"/>
+            <a:ext cx="1137514" cy="530352"/>
+          </a:xfrm>
+          <a:prstGeom prst="rect">
+            <a:avLst/>
+          </a:prstGeom>
+          <a:noFill/>
+          <a:ln w="38100">
+            <a:noFill/>
+          </a:ln>
+        </p:spPr>
+        <p:txBody>
+          <a:bodyPr wrap="square" lIns="0" tIns="36576" rIns="0" bIns="36576" rtlCol="0" anchor="ctr">
+            <a:noAutofit/>
+          </a:bodyPr>
+          <a:lstStyle/>
+          <a:p>
+            <a:pPr algn="ctr" indent="0" marL="0">
+              <a:buNone/>
+            </a:pPr>
+            <a:r>
+              <a:rPr lang="en-US" sz="2200" dirty="0" b="1">
+                <a:solidFill>
+                  <a:srgbClr val="1B2236"/>
+                </a:solidFill>
+                <a:latin typeface="Lexend Deca" pitchFamily="34" charset="0"/>
+                <a:ea typeface="Lexend Deca" pitchFamily="34" charset="-122"/>
+                <a:cs typeface="Lexend Deca" pitchFamily="34" charset="-120"/>
+              </a:rPr>
+              <a:t>Can I</a:t>
+            </a:r>
+            <a:endParaRPr lang="en-US" sz="2200" dirty="0"/>
+          </a:p>
+        </p:txBody>
+      </p:sp>
+      <p:sp>
+        <p:nvSpPr>
+          <p:cNvPr id="69" name="Rest"/>
+          <p:cNvSpPr/>
+          <p:nvPr/>
+        </p:nvSpPr>
+        <p:spPr>
+          <a:xfrm>
+            <a:off x="4987138" y="4114800"/>
+            <a:ext cx="2144268" cy="530352"/>
+          </a:xfrm>
+          <a:prstGeom prst="rect">
+            <a:avLst/>
+          </a:prstGeom>
+          <a:noFill/>
+          <a:ln w="38100">
+            <a:noFill/>
+          </a:ln>
+        </p:spPr>
+        <p:txBody>
+          <a:bodyPr wrap="square" lIns="0" tIns="36576" rIns="0" bIns="36576" rtlCol="0" anchor="ctr">
+            <a:noAutofit/>
+          </a:bodyPr>
+          <a:lstStyle/>
+          <a:p>
+            <a:pPr algn="l" indent="0" marL="0">
+              <a:buNone/>
+            </a:pPr>
+            <a:r>
+              <a:rPr lang="en-US" sz="2200" dirty="0">
+                <a:solidFill>
+                  <a:srgbClr val="1B2236"/>
+                </a:solidFill>
+                <a:latin typeface="Lexend Deca" pitchFamily="34" charset="0"/>
+                <a:ea typeface="Lexend Deca" pitchFamily="34" charset="-122"/>
+                <a:cs typeface="Lexend Deca" pitchFamily="34" charset="-120"/>
+              </a:rPr>
+              <a:t>pay by phone?</a:t>
+            </a:r>
+            <a:endParaRPr lang="en-US" sz="2200" dirty="0"/>
+          </a:p>
+        </p:txBody>
+      </p:sp>
+      <p:sp>
+        <p:nvSpPr>
+          <p:cNvPr id="70" name="Wh"/>
+          <p:cNvSpPr/>
+          <p:nvPr/>
+        </p:nvSpPr>
+        <p:spPr>
+          <a:xfrm>
+            <a:off x="3520440" y="4846320"/>
+            <a:ext cx="274320" cy="530352"/>
+          </a:xfrm>
+          <a:prstGeom prst="rect">
+            <a:avLst/>
+          </a:prstGeom>
+          <a:noFill/>
+          <a:ln w="38100">
+            <a:noFill/>
+          </a:ln>
+        </p:spPr>
+        <p:txBody>
+          <a:bodyPr wrap="square" lIns="0" tIns="36576" rIns="0" bIns="36576" rtlCol="0" anchor="ctr">
+            <a:noAutofit/>
+          </a:bodyPr>
+          <a:lstStyle/>
+          <a:p>
+            <a:pPr algn="l" indent="0" marL="0">
+              <a:buNone/>
+            </a:pPr>
+            <a:r>
+              <a:rPr lang="en-US" sz="2200" dirty="0">
+                <a:solidFill>
+                  <a:srgbClr val="1B2236"/>
+                </a:solidFill>
+                <a:latin typeface="Lexend Deca" pitchFamily="34" charset="0"/>
+                <a:ea typeface="Lexend Deca" pitchFamily="34" charset="-122"/>
+                <a:cs typeface="Lexend Deca" pitchFamily="34" charset="-120"/>
+              </a:rPr>
+              <a:t/>
+            </a:r>
+            <a:endParaRPr lang="en-US" sz="2200" dirty="0"/>
+          </a:p>
+        </p:txBody>
+      </p:sp>
+      <p:sp>
+        <p:nvSpPr>
+          <p:cNvPr id="71" name="Highlight"/>
+          <p:cNvSpPr/>
+          <p:nvPr/>
+        </p:nvSpPr>
+        <p:spPr>
+          <a:xfrm>
+            <a:off x="3794760" y="4846320"/>
+            <a:ext cx="1137514" cy="530352"/>
+          </a:xfrm>
+          <a:prstGeom prst="roundRect">
+            <a:avLst>
+              <a:gd name="adj" fmla="val 22000"/>
+            </a:avLst>
+          </a:prstGeom>
+          <a:solidFill>
+            <a:srgbClr val="FFE28C"/>
+          </a:solidFill>
+          <a:ln w="38100">
+            <a:noFill/>
+          </a:ln>
+        </p:spPr>
+        <p:txBody>
+          <a:bodyPr wrap="square" lIns="73152" tIns="36576" rIns="73152" bIns="36576" rtlCol="0" anchor="ctr">
+            <a:noAutofit/>
+          </a:bodyPr>
+          <a:lstStyle/>
+          <a:p>
+            <a:pPr algn="l" indent="0" marL="0">
+              <a:buNone/>
+            </a:pPr>
+            <a:r>
+              <a:rPr lang="en-US" sz="2000" dirty="0">
+                <a:solidFill>
+                  <a:srgbClr val="1B2236"/>
+                </a:solidFill>
+                <a:latin typeface="Lexend Deca" pitchFamily="34" charset="0"/>
+                <a:ea typeface="Lexend Deca" pitchFamily="34" charset="-122"/>
+                <a:cs typeface="Lexend Deca" pitchFamily="34" charset="-120"/>
+              </a:rPr>
+              <a:t/>
+            </a:r>
+            <a:endParaRPr lang="en-US" sz="2000" dirty="0"/>
+          </a:p>
+        </p:txBody>
+      </p:sp>
+      <p:sp>
+        <p:nvSpPr>
+          <p:cNvPr id="72" name="Helper"/>
+          <p:cNvSpPr/>
+          <p:nvPr/>
+        </p:nvSpPr>
+        <p:spPr>
+          <a:xfrm>
+            <a:off x="3794760" y="4846320"/>
+            <a:ext cx="1137514" cy="530352"/>
+          </a:xfrm>
+          <a:prstGeom prst="rect">
+            <a:avLst/>
+          </a:prstGeom>
+          <a:noFill/>
+          <a:ln w="38100">
+            <a:noFill/>
+          </a:ln>
+        </p:spPr>
+        <p:txBody>
+          <a:bodyPr wrap="square" lIns="0" tIns="36576" rIns="0" bIns="36576" rtlCol="0" anchor="ctr">
+            <a:noAutofit/>
+          </a:bodyPr>
+          <a:lstStyle/>
+          <a:p>
+            <a:pPr algn="ctr" indent="0" marL="0">
+              <a:buNone/>
+            </a:pPr>
+            <a:r>
+              <a:rPr lang="en-US" sz="2200" dirty="0" b="1">
+                <a:solidFill>
+                  <a:srgbClr val="1B2236"/>
+                </a:solidFill>
+                <a:latin typeface="Lexend Deca" pitchFamily="34" charset="0"/>
+                <a:ea typeface="Lexend Deca" pitchFamily="34" charset="-122"/>
+                <a:cs typeface="Lexend Deca" pitchFamily="34" charset="-120"/>
+              </a:rPr>
+              <a:t>Can I</a:t>
+            </a:r>
+            <a:endParaRPr lang="en-US" sz="2200" dirty="0"/>
+          </a:p>
+        </p:txBody>
+      </p:sp>
+      <p:sp>
+        <p:nvSpPr>
+          <p:cNvPr id="73" name="Rest"/>
+          <p:cNvSpPr/>
+          <p:nvPr/>
+        </p:nvSpPr>
+        <p:spPr>
+          <a:xfrm>
+            <a:off x="4987138" y="4846320"/>
+            <a:ext cx="2596896" cy="530352"/>
+          </a:xfrm>
+          <a:prstGeom prst="rect">
+            <a:avLst/>
+          </a:prstGeom>
+          <a:noFill/>
+          <a:ln w="38100">
+            <a:noFill/>
+          </a:ln>
+        </p:spPr>
+        <p:txBody>
+          <a:bodyPr wrap="square" lIns="0" tIns="36576" rIns="0" bIns="36576" rtlCol="0" anchor="ctr">
+            <a:noAutofit/>
+          </a:bodyPr>
+          <a:lstStyle/>
+          <a:p>
+            <a:pPr algn="l" indent="0" marL="0">
+              <a:buNone/>
+            </a:pPr>
+            <a:r>
+              <a:rPr lang="en-US" sz="2200" dirty="0">
+                <a:solidFill>
+                  <a:srgbClr val="1B2236"/>
+                </a:solidFill>
+                <a:latin typeface="Lexend Deca" pitchFamily="34" charset="0"/>
+                <a:ea typeface="Lexend Deca" pitchFamily="34" charset="-122"/>
+                <a:cs typeface="Lexend Deca" pitchFamily="34" charset="-120"/>
+              </a:rPr>
+              <a:t>leave a message?</a:t>
+            </a:r>
+            <a:endParaRPr lang="en-US" sz="2200" dirty="0"/>
+          </a:p>
+        </p:txBody>
+      </p:sp>
+      <p:sp>
+        <p:nvSpPr>
+          <p:cNvPr id="74" name="Wh"/>
+          <p:cNvSpPr/>
+          <p:nvPr/>
+        </p:nvSpPr>
+        <p:spPr>
+          <a:xfrm>
+            <a:off x="3520440" y="5577840"/>
+            <a:ext cx="274320" cy="530352"/>
+          </a:xfrm>
+          <a:prstGeom prst="rect">
+            <a:avLst/>
+          </a:prstGeom>
+          <a:noFill/>
+          <a:ln w="38100">
+            <a:noFill/>
+          </a:ln>
+        </p:spPr>
+        <p:txBody>
+          <a:bodyPr wrap="square" lIns="0" tIns="36576" rIns="0" bIns="36576" rtlCol="0" anchor="ctr">
+            <a:noAutofit/>
+          </a:bodyPr>
+          <a:lstStyle/>
+          <a:p>
+            <a:pPr algn="l" indent="0" marL="0">
+              <a:buNone/>
+            </a:pPr>
+            <a:r>
+              <a:rPr lang="en-US" sz="2200" dirty="0">
+                <a:solidFill>
+                  <a:srgbClr val="1B2236"/>
+                </a:solidFill>
+                <a:latin typeface="Lexend Deca" pitchFamily="34" charset="0"/>
+                <a:ea typeface="Lexend Deca" pitchFamily="34" charset="-122"/>
+                <a:cs typeface="Lexend Deca" pitchFamily="34" charset="-120"/>
+              </a:rPr>
+              <a:t/>
+            </a:r>
+            <a:endParaRPr lang="en-US" sz="2200" dirty="0"/>
+          </a:p>
+        </p:txBody>
+      </p:sp>
+      <p:sp>
+        <p:nvSpPr>
+          <p:cNvPr id="75" name="Highlight"/>
+          <p:cNvSpPr/>
+          <p:nvPr/>
+        </p:nvSpPr>
+        <p:spPr>
+          <a:xfrm>
+            <a:off x="3794760" y="5577840"/>
+            <a:ext cx="1137514" cy="530352"/>
+          </a:xfrm>
+          <a:prstGeom prst="roundRect">
+            <a:avLst>
+              <a:gd name="adj" fmla="val 22000"/>
+            </a:avLst>
+          </a:prstGeom>
+          <a:solidFill>
+            <a:srgbClr val="FFE28C"/>
+          </a:solidFill>
+          <a:ln w="38100">
+            <a:noFill/>
+          </a:ln>
+        </p:spPr>
+        <p:txBody>
+          <a:bodyPr wrap="square" lIns="73152" tIns="36576" rIns="73152" bIns="36576" rtlCol="0" anchor="ctr">
+            <a:noAutofit/>
+          </a:bodyPr>
+          <a:lstStyle/>
+          <a:p>
+            <a:pPr algn="l" indent="0" marL="0">
+              <a:buNone/>
+            </a:pPr>
+            <a:r>
+              <a:rPr lang="en-US" sz="2000" dirty="0">
+                <a:solidFill>
+                  <a:srgbClr val="1B2236"/>
+                </a:solidFill>
+                <a:latin typeface="Lexend Deca" pitchFamily="34" charset="0"/>
+                <a:ea typeface="Lexend Deca" pitchFamily="34" charset="-122"/>
+                <a:cs typeface="Lexend Deca" pitchFamily="34" charset="-120"/>
+              </a:rPr>
+              <a:t/>
+            </a:r>
+            <a:endParaRPr lang="en-US" sz="2000" dirty="0"/>
+          </a:p>
+        </p:txBody>
+      </p:sp>
+      <p:sp>
+        <p:nvSpPr>
+          <p:cNvPr id="76" name="Helper"/>
+          <p:cNvSpPr/>
+          <p:nvPr/>
+        </p:nvSpPr>
+        <p:spPr>
+          <a:xfrm>
+            <a:off x="3794760" y="5577840"/>
+            <a:ext cx="1137514" cy="530352"/>
+          </a:xfrm>
+          <a:prstGeom prst="rect">
+            <a:avLst/>
+          </a:prstGeom>
+          <a:noFill/>
+          <a:ln w="38100">
+            <a:noFill/>
+          </a:ln>
+        </p:spPr>
+        <p:txBody>
+          <a:bodyPr wrap="square" lIns="0" tIns="36576" rIns="0" bIns="36576" rtlCol="0" anchor="ctr">
+            <a:noAutofit/>
+          </a:bodyPr>
+          <a:lstStyle/>
+          <a:p>
+            <a:pPr algn="ctr" indent="0" marL="0">
+              <a:buNone/>
+            </a:pPr>
+            <a:r>
+              <a:rPr lang="en-US" sz="2200" dirty="0" b="1">
+                <a:solidFill>
+                  <a:srgbClr val="1B2236"/>
+                </a:solidFill>
+                <a:latin typeface="Lexend Deca" pitchFamily="34" charset="0"/>
+                <a:ea typeface="Lexend Deca" pitchFamily="34" charset="-122"/>
+                <a:cs typeface="Lexend Deca" pitchFamily="34" charset="-120"/>
+              </a:rPr>
+              <a:t>Can I</a:t>
+            </a:r>
+            <a:endParaRPr lang="en-US" sz="2200" dirty="0"/>
+          </a:p>
+        </p:txBody>
+      </p:sp>
+      <p:sp>
+        <p:nvSpPr>
+          <p:cNvPr id="77" name="Rest"/>
+          <p:cNvSpPr/>
+          <p:nvPr/>
+        </p:nvSpPr>
+        <p:spPr>
+          <a:xfrm>
+            <a:off x="4987138" y="5577840"/>
+            <a:ext cx="2898648" cy="530352"/>
+          </a:xfrm>
+          <a:prstGeom prst="rect">
+            <a:avLst/>
+          </a:prstGeom>
+          <a:noFill/>
+          <a:ln w="38100">
+            <a:noFill/>
+          </a:ln>
+        </p:spPr>
+        <p:txBody>
+          <a:bodyPr wrap="square" lIns="0" tIns="36576" rIns="0" bIns="36576" rtlCol="0" anchor="ctr">
+            <a:noAutofit/>
+          </a:bodyPr>
+          <a:lstStyle/>
+          <a:p>
+            <a:pPr algn="l" indent="0" marL="0">
+              <a:buNone/>
+            </a:pPr>
+            <a:r>
+              <a:rPr lang="en-US" sz="2200" dirty="0">
+                <a:solidFill>
+                  <a:srgbClr val="1B2236"/>
+                </a:solidFill>
+                <a:latin typeface="Lexend Deca" pitchFamily="34" charset="0"/>
+                <a:ea typeface="Lexend Deca" pitchFamily="34" charset="-122"/>
+                <a:cs typeface="Lexend Deca" pitchFamily="34" charset="-120"/>
+              </a:rPr>
+              <a:t>talk to a manager?</a:t>
+            </a:r>
+            <a:endParaRPr lang="en-US" sz="2200" dirty="0"/>
+          </a:p>
+        </p:txBody>
+      </p:sp>
+      <p:sp>
+        <p:nvSpPr>
+          <p:cNvPr id="78" name="Card head"/>
+          <p:cNvSpPr/>
+          <p:nvPr/>
+        </p:nvSpPr>
+        <p:spPr>
+          <a:xfrm>
+            <a:off x="8549640" y="1280160"/>
+            <a:ext cx="3017520" cy="548640"/>
+          </a:xfrm>
+          <a:prstGeom prst="rect">
+            <a:avLst/>
+          </a:prstGeom>
+          <a:noFill/>
+          <a:ln w="38100">
+            <a:noFill/>
+          </a:ln>
+        </p:spPr>
+        <p:txBody>
+          <a:bodyPr wrap="square" lIns="73152" tIns="36576" rIns="73152" bIns="36576" rtlCol="0" anchor="ctr">
+            <a:noAutofit/>
+          </a:bodyPr>
+          <a:lstStyle/>
+          <a:p>
+            <a:pPr algn="l" indent="0" marL="0">
+              <a:buNone/>
+            </a:pPr>
+            <a:r>
+              <a:rPr lang="en-US" sz="2400" dirty="0" b="1">
+                <a:solidFill>
+                  <a:srgbClr val="1B2236"/>
+                </a:solidFill>
+                <a:latin typeface="Lexend Deca" pitchFamily="34" charset="0"/>
+                <a:ea typeface="Lexend Deca" pitchFamily="34" charset="-122"/>
+                <a:cs typeface="Lexend Deca" pitchFamily="34" charset="-120"/>
+              </a:rPr>
+              <a:t>Answers</a:t>
+            </a:r>
+            <a:endParaRPr lang="en-US" sz="2400" dirty="0"/>
+          </a:p>
+        </p:txBody>
+      </p:sp>
+      <p:sp>
+        <p:nvSpPr>
+          <p:cNvPr id="79" name="Card item"/>
+          <p:cNvSpPr/>
+          <p:nvPr/>
+        </p:nvSpPr>
+        <p:spPr>
+          <a:xfrm>
+            <a:off x="8549640" y="1920240"/>
+            <a:ext cx="3017520" cy="457200"/>
+          </a:xfrm>
+          <a:prstGeom prst="rect">
+            <a:avLst/>
+          </a:prstGeom>
+          <a:noFill/>
+          <a:ln w="38100">
+            <a:noFill/>
+          </a:ln>
+        </p:spPr>
+        <p:txBody>
+          <a:bodyPr wrap="square" lIns="73152" tIns="36576" rIns="73152" bIns="36576" rtlCol="0" anchor="ctr">
+            <a:noAutofit/>
+          </a:bodyPr>
+          <a:lstStyle/>
+          <a:p>
+            <a:pPr algn="l" indent="0" marL="0">
+              <a:buNone/>
+            </a:pPr>
+            <a:r>
+              <a:rPr lang="en-US" sz="2000" dirty="0">
+                <a:solidFill>
+                  <a:srgbClr val="1B2236"/>
+                </a:solidFill>
+                <a:latin typeface="Lexend Deca" pitchFamily="34" charset="0"/>
+                <a:ea typeface="Lexend Deca" pitchFamily="34" charset="-122"/>
+                <a:cs typeface="Lexend Deca" pitchFamily="34" charset="-120"/>
+              </a:rPr>
+              <a:t>Yes, you can.</a:t>
+            </a:r>
+            <a:endParaRPr lang="en-US" sz="2000" dirty="0"/>
+          </a:p>
+        </p:txBody>
+      </p:sp>
+      <p:sp>
+        <p:nvSpPr>
+          <p:cNvPr id="80" name="Card item"/>
+          <p:cNvSpPr/>
+          <p:nvPr/>
+        </p:nvSpPr>
+        <p:spPr>
+          <a:xfrm>
+            <a:off x="8549640" y="2404872"/>
+            <a:ext cx="3017520" cy="777240"/>
+          </a:xfrm>
+          <a:prstGeom prst="rect">
+            <a:avLst/>
+          </a:prstGeom>
+          <a:noFill/>
+          <a:ln w="38100">
+            <a:noFill/>
+          </a:ln>
+        </p:spPr>
+        <p:txBody>
+          <a:bodyPr wrap="square" lIns="73152" tIns="36576" rIns="73152" bIns="36576" rtlCol="0" anchor="ctr">
+            <a:noAutofit/>
+          </a:bodyPr>
+          <a:lstStyle/>
+          <a:p>
+            <a:pPr algn="l" indent="0" marL="0">
+              <a:buNone/>
+            </a:pPr>
+            <a:r>
+              <a:rPr lang="en-US" sz="2000" dirty="0">
+                <a:solidFill>
+                  <a:srgbClr val="1B2236"/>
+                </a:solidFill>
+                <a:latin typeface="Lexend Deca" pitchFamily="34" charset="0"/>
+                <a:ea typeface="Lexend Deca" pitchFamily="34" charset="-122"/>
+                <a:cs typeface="Lexend Deca" pitchFamily="34" charset="-120"/>
+              </a:rPr>
+              <a:t>Sure. One moment, please.</a:t>
+            </a:r>
+            <a:endParaRPr lang="en-US" sz="2000" dirty="0"/>
+          </a:p>
+        </p:txBody>
+      </p:sp>
+      <p:sp>
+        <p:nvSpPr>
+          <p:cNvPr id="81" name="Card item"/>
+          <p:cNvSpPr/>
+          <p:nvPr/>
+        </p:nvSpPr>
+        <p:spPr>
+          <a:xfrm>
+            <a:off x="8549640" y="3209544"/>
+            <a:ext cx="3017520" cy="457200"/>
+          </a:xfrm>
+          <a:prstGeom prst="rect">
+            <a:avLst/>
+          </a:prstGeom>
+          <a:noFill/>
+          <a:ln w="38100">
+            <a:noFill/>
+          </a:ln>
+        </p:spPr>
+        <p:txBody>
+          <a:bodyPr wrap="square" lIns="73152" tIns="36576" rIns="73152" bIns="36576" rtlCol="0" anchor="ctr">
+            <a:noAutofit/>
+          </a:bodyPr>
+          <a:lstStyle/>
+          <a:p>
+            <a:pPr algn="l" indent="0" marL="0">
+              <a:buNone/>
+            </a:pPr>
+            <a:r>
+              <a:rPr lang="en-US" sz="2000" dirty="0">
+                <a:solidFill>
+                  <a:srgbClr val="1B2236"/>
+                </a:solidFill>
+                <a:latin typeface="Lexend Deca" pitchFamily="34" charset="0"/>
+                <a:ea typeface="Lexend Deca" pitchFamily="34" charset="-122"/>
+                <a:cs typeface="Lexend Deca" pitchFamily="34" charset="-120"/>
+              </a:rPr>
+              <a:t>Sorry, you can't.</a:t>
+            </a:r>
+            <a:endParaRPr lang="en-US" sz="2000" dirty="0"/>
+          </a:p>
+        </p:txBody>
+      </p:sp>
+      <p:sp>
+        <p:nvSpPr>
+          <p:cNvPr id="82" name="Example"/>
+          <p:cNvSpPr/>
+          <p:nvPr/>
+        </p:nvSpPr>
+        <p:spPr>
+          <a:xfrm>
+            <a:off x="8549640" y="5029200"/>
+            <a:ext cx="3017520" cy="868680"/>
+          </a:xfrm>
+          <a:prstGeom prst="roundRect">
+            <a:avLst>
+              <a:gd name="adj" fmla="val 22000"/>
+            </a:avLst>
+          </a:prstGeom>
+          <a:solidFill>
+            <a:srgbClr val="FFFFFF"/>
+          </a:solidFill>
+          <a:ln w="38100">
+            <a:noFill/>
+          </a:ln>
+        </p:spPr>
+        <p:txBody>
+          <a:bodyPr wrap="square" lIns="73152" tIns="36576" rIns="73152" bIns="36576" rtlCol="0" anchor="ctr">
+            <a:noAutofit/>
+          </a:bodyPr>
+          <a:lstStyle/>
+          <a:p>
+            <a:pPr algn="ctr" indent="0" marL="0">
+              <a:buNone/>
+            </a:pPr>
+            <a:r>
+              <a:rPr lang="en-US" sz="2200" dirty="0">
+                <a:solidFill>
+                  <a:srgbClr val="1B2236"/>
+                </a:solidFill>
+                <a:latin typeface="Lexend Deca" pitchFamily="34" charset="0"/>
+                <a:ea typeface="Lexend Deca" pitchFamily="34" charset="-122"/>
+                <a:cs typeface="Lexend Deca" pitchFamily="34" charset="-120"/>
+              </a:rPr>
+              <a:t>You </a:t>
+            </a:r>
+            <a:r>
+              <a:rPr lang="en-US" sz="2200" dirty="0" b="1">
+                <a:solidFill>
+                  <a:srgbClr val="5B3FC4"/>
+                </a:solidFill>
+                <a:latin typeface="Lexend Deca" pitchFamily="34" charset="0"/>
+                <a:ea typeface="Lexend Deca" pitchFamily="34" charset="-122"/>
+                <a:cs typeface="Lexend Deca" pitchFamily="34" charset="-120"/>
+              </a:rPr>
+              <a:t>have to</a:t>
+            </a:r>
+            <a:r>
+              <a:rPr lang="en-US" sz="2200" dirty="0">
+                <a:solidFill>
+                  <a:srgbClr val="1B2236"/>
+                </a:solidFill>
+                <a:latin typeface="Lexend Deca" pitchFamily="34" charset="0"/>
+                <a:ea typeface="Lexend Deca" pitchFamily="34" charset="-122"/>
+                <a:cs typeface="Lexend Deca" pitchFamily="34" charset="-120"/>
+              </a:rPr>
+              <a:t> come in person.</a:t>
+            </a:r>
+            <a:endParaRPr lang="en-US" sz="2200" dirty="0"/>
+          </a:p>
+        </p:txBody>
+      </p:sp>
+    </p:spTree>
+  </p:cSld>
+  <p:clrMapOvr>
+    <a:masterClrMapping/>
+  </p:clrMapOvr>
+  <p:timing>
+    <p:tnLst>
+      <p:par>
+        <p:cTn id="1" dur="indefinite" restart="never" nodeType="tmRoot">
+          <p:childTnLst>
+            <p:seq concurrent="1" nextAc="seek">
+              <p:cTn id="2" dur="indefinite" nodeType="mainSeq">
+                <p:childTnLst>
+                  <p:par>
+                    <p:cTn id="3" fill="hold">
+                      <p:stCondLst>
+                        <p:cond delay="indefinite"/>
+                      </p:stCondLst>
+                      <p:childTnLst>
+                        <p:par>
+                          <p:cTn id="4" fill="hold">
+                            <p:stCondLst>
+                              <p:cond delay="0"/>
+                            </p:stCondLst>
+                            <p:childTnLst>
+                              <p:par>
+                                <p:cTn id="5" presetID="10" presetClass="entr" presetSubtype="0" fill="hold" nodeType="clickEffect">
+                                  <p:stCondLst>
+                                    <p:cond delay="0"/>
+                                  </p:stCondLst>
+                                  <p:childTnLst>
+                                    <p:set>
+                                      <p:cBhvr>
+                                        <p:cTn id="6" dur="1" fill="hold">
+                                          <p:stCondLst>
+                                            <p:cond delay="0"/>
+                                          </p:stCondLst>
+                                        </p:cTn>
+                                        <p:tgtEl>
+                                          <p:spTgt spid="67"/>
+                                        </p:tgtEl>
+                                        <p:attrNameLst>
+                                          <p:attrName>style.visibility</p:attrName>
+                                        </p:attrNameLst>
+                                      </p:cBhvr>
+                                      <p:to>
+                                        <p:strVal val="visible"/>
+                                      </p:to>
+                                    </p:set>
+                                    <p:animEffect transition="in" filter="fade">
+                                      <p:cBhvr>
+                                        <p:cTn id="7" dur="400"/>
+                                        <p:tgtEl>
+                                          <p:spTgt spid="67"/>
+                                        </p:tgtEl>
+                                      </p:cBhvr>
+                                    </p:animEffect>
+                                  </p:childTnLst>
+                                </p:cTn>
+                              </p:par>
+                            </p:childTnLst>
+                          </p:cTn>
+                        </p:par>
+                      </p:childTnLst>
+                    </p:cTn>
+                  </p:par>
+                  <p:par>
+                    <p:cTn id="8" fill="hold">
+                      <p:stCondLst>
+                        <p:cond delay="indefinite"/>
+                      </p:stCondLst>
+                      <p:childTnLst>
+                        <p:par>
+                          <p:cTn id="9" fill="hold">
+                            <p:stCondLst>
+                              <p:cond delay="0"/>
+                            </p:stCondLst>
+                            <p:childTnLst>
+                              <p:par>
+                                <p:cTn id="10" presetID="10" presetClass="entr" presetSubtype="0" fill="hold" nodeType="clickEffect">
+                                  <p:stCondLst>
+                                    <p:cond delay="0"/>
+                                  </p:stCondLst>
+                                  <p:childTnLst>
+                                    <p:set>
+                                      <p:cBhvr>
+                                        <p:cTn id="11" dur="1" fill="hold">
+                                          <p:stCondLst>
+                                            <p:cond delay="0"/>
+                                          </p:stCondLst>
+                                        </p:cTn>
+                                        <p:tgtEl>
+                                          <p:spTgt spid="71"/>
+                                        </p:tgtEl>
+                                        <p:attrNameLst>
+                                          <p:attrName>style.visibility</p:attrName>
+                                        </p:attrNameLst>
+                                      </p:cBhvr>
+                                      <p:to>
+                                        <p:strVal val="visible"/>
+                                      </p:to>
+                                    </p:set>
+                                    <p:animEffect transition="in" filter="fade">
+                                      <p:cBhvr>
+                                        <p:cTn id="12" dur="400"/>
+                                        <p:tgtEl>
+                                          <p:spTgt spid="71"/>
+                                        </p:tgtEl>
+                                      </p:cBhvr>
+                                    </p:animEffect>
+                                  </p:childTnLst>
+                                </p:cTn>
+                              </p:par>
+                            </p:childTnLst>
+                          </p:cTn>
+                        </p:par>
+                      </p:childTnLst>
+                    </p:cTn>
+                  </p:par>
+                  <p:par>
+                    <p:cTn id="13" fill="hold">
+                      <p:stCondLst>
+                        <p:cond delay="indefinite"/>
+                      </p:stCondLst>
+                      <p:childTnLst>
+                        <p:par>
+                          <p:cTn id="14" fill="hold">
+                            <p:stCondLst>
+                              <p:cond delay="0"/>
+                            </p:stCondLst>
+                            <p:childTnLst>
+                              <p:par>
+                                <p:cTn id="15" presetID="10" presetClass="entr" presetSubtype="0" fill="hold" nodeType="clickEffect">
+                                  <p:stCondLst>
+                                    <p:cond delay="0"/>
+                                  </p:stCondLst>
+                                  <p:childTnLst>
+                                    <p:set>
+                                      <p:cBhvr>
+                                        <p:cTn id="16" dur="1" fill="hold">
+                                          <p:stCondLst>
+                                            <p:cond delay="0"/>
+                                          </p:stCondLst>
+                                        </p:cTn>
+                                        <p:tgtEl>
+                                          <p:spTgt spid="75"/>
+                                        </p:tgtEl>
+                                        <p:attrNameLst>
+                                          <p:attrName>style.visibility</p:attrName>
+                                        </p:attrNameLst>
+                                      </p:cBhvr>
+                                      <p:to>
+                                        <p:strVal val="visible"/>
+                                      </p:to>
+                                    </p:set>
+                                    <p:animEffect transition="in" filter="fade">
+                                      <p:cBhvr>
+                                        <p:cTn id="17" dur="400"/>
+                                        <p:tgtEl>
+                                          <p:spTgt spid="75"/>
                                         </p:tgtEl>
                                       </p:cBhvr>
                                     </p:animEffect>
@@ -20217,7 +20001,7 @@
 
 <file path=ppt/slides/slide9.xml><?xml version="1.0" encoding="utf-8"?>
 <p:sld xmlns:a="http://schemas.openxmlformats.org/drawingml/2006/main" xmlns:r="http://schemas.openxmlformats.org/officeDocument/2006/relationships" xmlns:p="http://schemas.openxmlformats.org/presentationml/2006/main">
-  <p:cSld name="Slide 9">
+  <p:cSld name="Slide 5">
     <p:bg>
       <p:bgPr>
         <a:solidFill>
@@ -20247,14 +20031,16 @@
         </p:nvSpPr>
         <p:spPr>
           <a:xfrm>
-            <a:off x="0" y="0"/>
-            <a:ext cx="3063240" cy="6858000"/>
-          </a:xfrm>
-          <a:prstGeom prst="rect">
-            <a:avLst/>
-          </a:prstGeom>
-          <a:solidFill>
-            <a:srgbClr val="B9D2F7"/>
+            <a:off x="5076429" y="1163345"/>
+            <a:ext cx="5814670" cy="1863547"/>
+          </a:xfrm>
+          <a:prstGeom prst="roundRect">
+            <a:avLst>
+              <a:gd name="adj" fmla="val 16667"/>
+            </a:avLst>
+          </a:prstGeom>
+          <a:solidFill>
+            <a:srgbClr val="8FAFE3"/>
           </a:solidFill>
           <a:ln/>
         </p:spPr>
@@ -20265,14 +20051,40 @@
       </p:sp>
       <p:sp>
         <p:nvSpPr>
+          <p:cNvPr id="3" name="Shape 1"/>
+          <p:cNvSpPr/>
+          <p:nvPr/>
+        </p:nvSpPr>
+        <p:spPr>
+          <a:xfrm>
+            <a:off x="5110582" y="1087222"/>
+            <a:ext cx="5814670" cy="1863547"/>
+          </a:xfrm>
+          <a:prstGeom prst="roundRect">
+            <a:avLst>
+              <a:gd name="adj" fmla="val 16667"/>
+            </a:avLst>
+          </a:prstGeom>
+          <a:solidFill>
+            <a:srgbClr val="FFFFFF"/>
+          </a:solidFill>
+          <a:ln/>
+        </p:spPr>
+        <p:txBody>
+          <a:bodyPr/>
+          <a:p/>
+        </p:txBody>
+      </p:sp>
+      <p:sp>
+        <p:nvSpPr>
           <p:cNvPr id="4" name="Shape 2"/>
           <p:cNvSpPr/>
           <p:nvPr/>
         </p:nvSpPr>
         <p:spPr>
-          <a:xfrm>
-            <a:off x="8156448" y="1289304"/>
-            <a:ext cx="3429000" cy="4983480"/>
+          <a:xfrm flipV="1">
+            <a:off x="-106985" y="-101498"/>
+            <a:ext cx="3844138" cy="6418174"/>
           </a:xfrm>
           <a:prstGeom prst="round1Rect">
             <a:avLst>
@@ -20280,9 +20092,14 @@
             </a:avLst>
           </a:prstGeom>
           <a:solidFill>
-            <a:srgbClr val="8FAFE3"/>
-          </a:solidFill>
-          <a:ln/>
+            <a:srgbClr val="B9D2F7"/>
+          </a:solidFill>
+          <a:ln w="76200">
+            <a:solidFill>
+              <a:srgbClr val="FFFFFF"/>
+            </a:solidFill>
+            <a:prstDash val="solid"/>
+          </a:ln>
         </p:spPr>
         <p:txBody>
           <a:bodyPr/>
@@ -20291,22 +20108,160 @@
       </p:sp>
       <p:sp>
         <p:nvSpPr>
-          <p:cNvPr id="5" name="Shape 3"/>
-          <p:cNvSpPr/>
-          <p:nvPr/>
-        </p:nvSpPr>
-        <p:spPr>
-          <a:xfrm>
-            <a:off x="8321040" y="1097280"/>
-            <a:ext cx="3429000" cy="4983480"/>
-          </a:xfrm>
-          <a:prstGeom prst="round1Rect">
-            <a:avLst>
-              <a:gd name="adj" fmla="val 23087"/>
-            </a:avLst>
-          </a:prstGeom>
-          <a:solidFill>
-            <a:srgbClr val="B9D2F7"/>
+          <p:cNvPr id="7" name="Text 5"/>
+          <p:cNvSpPr/>
+          <p:nvPr/>
+        </p:nvSpPr>
+        <p:spPr>
+          <a:xfrm>
+            <a:off x="5333695" y="1280160"/>
+            <a:ext cx="4846320" cy="1463040"/>
+          </a:xfrm>
+          <a:prstGeom prst="rect">
+            <a:avLst/>
+          </a:prstGeom>
+          <a:noFill/>
+          <a:ln/>
+        </p:spPr>
+        <p:txBody>
+          <a:bodyPr wrap="square" rtlCol="0" anchor="ctr"/>
+          <a:lstStyle/>
+          <a:p>
+            <a:pPr algn="l" indent="0" marL="0">
+              <a:spcAft>
+                <a:spcPts val="400"/>
+              </a:spcAft>
+              <a:buNone/>
+            </a:pPr>
+            <a:r>
+              <a:rPr lang="en-US" sz="2000" dirty="0" b="1">
+                <a:solidFill>
+                  <a:srgbClr val="5B3FC4"/>
+                </a:solidFill>
+                <a:latin typeface="Lexend Deca" pitchFamily="34" charset="0"/>
+                <a:ea typeface="Lexend Deca" pitchFamily="34" charset="-122"/>
+                <a:cs typeface="Lexend Deca" pitchFamily="34" charset="-120"/>
+              </a:rPr>
+              <a:t>Grammar Box 1</a:t>
+            </a:r>
+            <a:endParaRPr lang="en-US" sz="2000" dirty="0"/>
+          </a:p>
+          <a:p>
+            <a:pPr algn="l" indent="0" marL="0">
+              <a:spcAft>
+                <a:spcPts val="400"/>
+              </a:spcAft>
+              <a:buNone/>
+            </a:pPr>
+            <a:r>
+              <a:rPr lang="en-US" sz="3000" dirty="0" b="1">
+                <a:solidFill>
+                  <a:srgbClr val="1B2236"/>
+                </a:solidFill>
+                <a:latin typeface="Lexend Deca" pitchFamily="34" charset="0"/>
+                <a:ea typeface="Lexend Deca" pitchFamily="34" charset="-122"/>
+                <a:cs typeface="Lexend Deca" pitchFamily="34" charset="-120"/>
+              </a:rPr>
+              <a:t>Do I have to ...?</a:t>
+            </a:r>
+            <a:endParaRPr lang="en-US" sz="3000" dirty="0"/>
+          </a:p>
+        </p:txBody>
+      </p:sp>
+      <p:sp>
+        <p:nvSpPr>
+          <p:cNvPr id="8" name="Text 6"/>
+          <p:cNvSpPr/>
+          <p:nvPr/>
+        </p:nvSpPr>
+        <p:spPr>
+          <a:xfrm>
+            <a:off x="5166360" y="3246120"/>
+            <a:ext cx="2743200" cy="457200"/>
+          </a:xfrm>
+          <a:prstGeom prst="rect">
+            <a:avLst/>
+          </a:prstGeom>
+          <a:noFill/>
+          <a:ln/>
+        </p:spPr>
+        <p:txBody>
+          <a:bodyPr wrap="square" rtlCol="0" anchor="ctr"/>
+          <a:lstStyle/>
+          <a:p>
+            <a:pPr algn="l" indent="0" marL="0">
+              <a:buNone/>
+            </a:pPr>
+            <a:r>
+              <a:rPr lang="en-US" sz="2000" dirty="0" b="1">
+                <a:solidFill>
+                  <a:srgbClr val="5B3FC4"/>
+                </a:solidFill>
+                <a:latin typeface="Lexend Deca" pitchFamily="34" charset="0"/>
+                <a:ea typeface="Lexend Deca" pitchFamily="34" charset="-122"/>
+                <a:cs typeface="Lexend Deca" pitchFamily="34" charset="-120"/>
+              </a:rPr>
+              <a:t>QUESTION</a:t>
+            </a:r>
+            <a:endParaRPr lang="en-US" sz="2000" dirty="0"/>
+          </a:p>
+        </p:txBody>
+      </p:sp>
+      <p:sp>
+        <p:nvSpPr>
+          <p:cNvPr id="11" name="Text 9"/>
+          <p:cNvSpPr/>
+          <p:nvPr/>
+        </p:nvSpPr>
+        <p:spPr>
+          <a:xfrm>
+            <a:off x="8741664" y="3246120"/>
+            <a:ext cx="2743200" cy="457200"/>
+          </a:xfrm>
+          <a:prstGeom prst="rect">
+            <a:avLst/>
+          </a:prstGeom>
+          <a:noFill/>
+          <a:ln/>
+        </p:spPr>
+        <p:txBody>
+          <a:bodyPr wrap="square" rtlCol="0" anchor="ctr"/>
+          <a:lstStyle/>
+          <a:p>
+            <a:pPr algn="l" indent="0" marL="0">
+              <a:buNone/>
+            </a:pPr>
+            <a:r>
+              <a:rPr lang="en-US" sz="2000" dirty="0" b="1">
+                <a:solidFill>
+                  <a:srgbClr val="5B3FC4"/>
+                </a:solidFill>
+                <a:latin typeface="Lexend Deca" pitchFamily="34" charset="0"/>
+                <a:ea typeface="Lexend Deca" pitchFamily="34" charset="-122"/>
+                <a:cs typeface="Lexend Deca" pitchFamily="34" charset="-120"/>
+              </a:rPr>
+              <a:t>ANSWER</a:t>
+            </a:r>
+            <a:endParaRPr lang="en-US" sz="2000" dirty="0"/>
+          </a:p>
+        </p:txBody>
+      </p:sp>
+      <p:sp>
+        <p:nvSpPr>
+          <p:cNvPr id="14" name="Shape 12"/>
+          <p:cNvSpPr/>
+          <p:nvPr/>
+        </p:nvSpPr>
+        <p:spPr>
+          <a:xfrm>
+            <a:off x="10245852" y="2478938"/>
+            <a:ext cx="1024128" cy="967435"/>
+          </a:xfrm>
+          <a:prstGeom prst="star10">
+            <a:avLst/>
+          </a:prstGeom>
+          <a:solidFill>
+            <a:srgbClr val="8FAFE3"/>
           </a:solidFill>
           <a:ln/>
         </p:spPr>
@@ -20317,22 +20272,20 @@
       </p:sp>
       <p:sp>
         <p:nvSpPr>
-          <p:cNvPr id="6" name="Shape 4"/>
-          <p:cNvSpPr/>
-          <p:nvPr/>
-        </p:nvSpPr>
-        <p:spPr>
-          <a:xfrm>
-            <a:off x="3394847" y="1032586"/>
-            <a:ext cx="4424782" cy="1863547"/>
-          </a:xfrm>
-          <a:prstGeom prst="roundRect">
-            <a:avLst>
-              <a:gd name="adj" fmla="val 16667"/>
-            </a:avLst>
-          </a:prstGeom>
-          <a:solidFill>
-            <a:srgbClr val="8FAFE3"/>
+          <p:cNvPr id="15" name="Shape 13"/>
+          <p:cNvSpPr/>
+          <p:nvPr/>
+        </p:nvSpPr>
+        <p:spPr>
+          <a:xfrm>
+            <a:off x="10328148" y="2466137"/>
+            <a:ext cx="1042416" cy="1042416"/>
+          </a:xfrm>
+          <a:prstGeom prst="star10">
+            <a:avLst/>
+          </a:prstGeom>
+          <a:solidFill>
+            <a:srgbClr val="FFE28C"/>
           </a:solidFill>
           <a:ln/>
         </p:spPr>
@@ -20343,22 +20296,20 @@
       </p:sp>
       <p:sp>
         <p:nvSpPr>
-          <p:cNvPr id="7" name="Shape 5"/>
-          <p:cNvSpPr/>
-          <p:nvPr/>
-        </p:nvSpPr>
-        <p:spPr>
-          <a:xfrm>
-            <a:off x="3420770" y="956462"/>
-            <a:ext cx="4424782" cy="1863547"/>
-          </a:xfrm>
-          <a:prstGeom prst="roundRect">
-            <a:avLst>
-              <a:gd name="adj" fmla="val 16667"/>
-            </a:avLst>
-          </a:prstGeom>
-          <a:solidFill>
-            <a:srgbClr val="FFFFFF"/>
+          <p:cNvPr id="16" name="Shape 14"/>
+          <p:cNvSpPr/>
+          <p:nvPr/>
+        </p:nvSpPr>
+        <p:spPr>
+          <a:xfrm rot="900000">
+            <a:off x="10611612" y="2765146"/>
+            <a:ext cx="445313" cy="445313"/>
+          </a:xfrm>
+          <a:prstGeom prst="mathPlus">
+            <a:avLst/>
+          </a:prstGeom>
+          <a:solidFill>
+            <a:srgbClr val="1B2236"/>
           </a:solidFill>
           <a:ln/>
         </p:spPr>
@@ -20367,148 +20318,9 @@
           <a:p/>
         </p:txBody>
       </p:sp>
-      <p:sp>
-        <p:nvSpPr>
-          <p:cNvPr id="8" name="Text 6"/>
-          <p:cNvSpPr/>
-          <p:nvPr/>
-        </p:nvSpPr>
-        <p:spPr>
-          <a:xfrm>
-            <a:off x="3566160" y="1078992"/>
-            <a:ext cx="4114800" cy="749808"/>
-          </a:xfrm>
-          <a:prstGeom prst="rect">
-            <a:avLst/>
-          </a:prstGeom>
-          <a:noFill/>
-          <a:ln/>
-        </p:spPr>
-        <p:txBody>
-          <a:bodyPr wrap="square" rtlCol="0" anchor="ctr"/>
-          <a:lstStyle/>
-          <a:p>
-            <a:pPr algn="l" indent="0" marL="0">
-              <a:buNone/>
-            </a:pPr>
-            <a:r>
-              <a:rPr lang="en-US" sz="4400" dirty="0" b="1">
-                <a:solidFill>
-                  <a:srgbClr val="1B2236"/>
-                </a:solidFill>
-                <a:latin typeface="Lexend Deca" pitchFamily="34" charset="0"/>
-                <a:ea typeface="Lexend Deca" pitchFamily="34" charset="-122"/>
-                <a:cs typeface="Lexend Deca" pitchFamily="34" charset="-120"/>
-              </a:rPr>
-              <a:t>Can I pay</a:t>
-            </a:r>
-            <a:endParaRPr lang="en-US" sz="4400" dirty="0"/>
-          </a:p>
-        </p:txBody>
-      </p:sp>
-      <p:sp>
-        <p:nvSpPr>
-          <p:cNvPr id="9" name="Text 7"/>
-          <p:cNvSpPr/>
-          <p:nvPr/>
-        </p:nvSpPr>
-        <p:spPr>
-          <a:xfrm>
-            <a:off x="3566160" y="1828800"/>
-            <a:ext cx="4114800" cy="822960"/>
-          </a:xfrm>
-          <a:prstGeom prst="rect">
-            <a:avLst/>
-          </a:prstGeom>
-          <a:noFill/>
-          <a:ln/>
-        </p:spPr>
-        <p:txBody>
-          <a:bodyPr wrap="square" rtlCol="0" anchor="ctr"/>
-          <a:lstStyle/>
-          <a:p>
-            <a:pPr algn="l" indent="0" marL="0">
-              <a:buNone/>
-            </a:pPr>
-            <a:r>
-              <a:rPr lang="en-US" sz="4400" dirty="0" b="1">
-                <a:solidFill>
-                  <a:srgbClr val="1B2236"/>
-                </a:solidFill>
-                <a:latin typeface="Lexend Deca" pitchFamily="34" charset="0"/>
-                <a:ea typeface="Lexend Deca" pitchFamily="34" charset="-122"/>
-                <a:cs typeface="Lexend Deca" pitchFamily="34" charset="-120"/>
-              </a:rPr>
-              <a:t>by phone?</a:t>
-            </a:r>
-            <a:endParaRPr lang="en-US" sz="4400" dirty="0"/>
-          </a:p>
-        </p:txBody>
-      </p:sp>
-      <p:sp>
-        <p:nvSpPr>
-          <p:cNvPr id="10" name="Text 8"/>
-          <p:cNvSpPr/>
-          <p:nvPr/>
-        </p:nvSpPr>
-        <p:spPr>
-          <a:xfrm>
-            <a:off x="3487522" y="3108960"/>
-            <a:ext cx="4206240" cy="868680"/>
-          </a:xfrm>
-          <a:prstGeom prst="rect">
-            <a:avLst/>
-          </a:prstGeom>
-          <a:noFill/>
-          <a:ln/>
-        </p:spPr>
-        <p:txBody>
-          <a:bodyPr wrap="square" lIns="0" tIns="0" rIns="0" bIns="0" rtlCol="0" anchor="ctr"/>
-          <a:lstStyle/>
-          <a:p>
-            <a:pPr algn="l" indent="0" marL="0">
-              <a:buNone/>
-            </a:pPr>
-            <a:r>
-              <a:rPr lang="en-US" sz="2000" dirty="0">
-                <a:solidFill>
-                  <a:srgbClr val="1B2236"/>
-                </a:solidFill>
-                <a:latin typeface="Lexend Deca" pitchFamily="34" charset="0"/>
-                <a:ea typeface="Lexend Deca" pitchFamily="34" charset="-122"/>
-                <a:cs typeface="Lexend Deca" pitchFamily="34" charset="-120"/>
-              </a:rPr>
-              <a:t>Asking: </a:t>
-            </a:r>
-            <a:r>
-              <a:rPr lang="en-US" sz="2000" dirty="0" b="1">
-                <a:solidFill>
-                  <a:srgbClr val="5B3FC4"/>
-                </a:solidFill>
-                <a:latin typeface="Lexend Deca" pitchFamily="34" charset="0"/>
-                <a:ea typeface="Lexend Deca" pitchFamily="34" charset="-122"/>
-                <a:cs typeface="Lexend Deca" pitchFamily="34" charset="-120"/>
-              </a:rPr>
-              <a:t>Can I</a:t>
-            </a:r>
-            <a:r>
-              <a:rPr lang="en-US" sz="2000" dirty="0">
-                <a:solidFill>
-                  <a:srgbClr val="1B2236"/>
-                </a:solidFill>
-                <a:latin typeface="Lexend Deca" pitchFamily="34" charset="0"/>
-                <a:ea typeface="Lexend Deca" pitchFamily="34" charset="-122"/>
-                <a:cs typeface="Lexend Deca" pitchFamily="34" charset="-120"/>
-              </a:rPr>
-              <a:t> …?</a:t>
-            </a:r>
-            <a:endParaRPr lang="en-US" sz="2000" dirty="0"/>
-          </a:p>
-        </p:txBody>
-      </p:sp>
       <p:pic>
         <p:nvPicPr>
-          <p:cNvPr id="65" name="Picture 65" descr="L12_leave_a_message.png"/>
+          <p:cNvPr id="44" name="Picture 44" descr="L12_fill_out_a_form.png"/>
           <p:cNvPicPr>
             <a:picLocks noChangeAspect="1"/>
           </p:cNvPicPr>
@@ -20522,8 +20334,8 @@
         </p:blipFill>
         <p:spPr>
           <a:xfrm>
-            <a:off x="160020" y="2423160"/>
-            <a:ext cx="2743200" cy="1920240"/>
+            <a:off x="699516" y="2264969"/>
+            <a:ext cx="3326587" cy="2328611"/>
           </a:xfrm>
           <a:prstGeom prst="rect">
             <a:avLst/>
@@ -20532,14 +20344,61 @@
       </p:pic>
       <p:sp>
         <p:nvSpPr>
-          <p:cNvPr id="66" name="Wh"/>
-          <p:cNvSpPr/>
-          <p:nvPr/>
-        </p:nvSpPr>
-        <p:spPr>
-          <a:xfrm>
-            <a:off x="3520440" y="4114800"/>
-            <a:ext cx="274320" cy="530352"/>
+          <p:cNvPr id="45" name="Highlight"/>
+          <p:cNvSpPr/>
+          <p:nvPr/>
+        </p:nvSpPr>
+        <p:spPr>
+          <a:xfrm>
+            <a:off x="5138928" y="3899916"/>
+            <a:ext cx="960120" cy="566928"/>
+          </a:xfrm>
+          <a:prstGeom prst="roundRect">
+            <a:avLst>
+              <a:gd name="adj" fmla="val 22000"/>
+            </a:avLst>
+          </a:prstGeom>
+          <a:solidFill>
+            <a:srgbClr val="FFE28C"/>
+          </a:solidFill>
+          <a:ln w="38100">
+            <a:noFill/>
+          </a:ln>
+        </p:spPr>
+        <p:txBody>
+          <a:bodyPr wrap="square" lIns="73152" tIns="36576" rIns="73152" bIns="36576" rtlCol="0" anchor="ctr">
+            <a:noAutofit/>
+          </a:bodyPr>
+          <a:lstStyle/>
+          <a:p>
+            <a:pPr algn="l" indent="0" marL="0">
+              <a:buNone/>
+            </a:pPr>
+            <a:r>
+              <a:rPr lang="en-US" sz="2000" dirty="0">
+                <a:solidFill>
+                  <a:srgbClr val="1B2236"/>
+                </a:solidFill>
+                <a:latin typeface="Lexend Deca" pitchFamily="34" charset="0"/>
+                <a:ea typeface="Lexend Deca" pitchFamily="34" charset="-122"/>
+                <a:cs typeface="Lexend Deca" pitchFamily="34" charset="-120"/>
+              </a:rPr>
+              <a:t/>
+            </a:r>
+            <a:endParaRPr lang="en-US" sz="2000" dirty="0"/>
+          </a:p>
+        </p:txBody>
+      </p:sp>
+      <p:sp>
+        <p:nvSpPr>
+          <p:cNvPr id="46" name="Helper"/>
+          <p:cNvSpPr/>
+          <p:nvPr/>
+        </p:nvSpPr>
+        <p:spPr>
+          <a:xfrm>
+            <a:off x="5138928" y="3749040"/>
+            <a:ext cx="960120" cy="868680"/>
           </a:xfrm>
           <a:prstGeom prst="rect">
             <a:avLst/>
@@ -20550,11 +20409,54 @@
           </a:ln>
         </p:spPr>
         <p:txBody>
-          <a:bodyPr wrap="square" lIns="0" tIns="36576" rIns="0" bIns="36576" rtlCol="0" anchor="ctr">
+          <a:bodyPr wrap="square" lIns="18288" tIns="36576" rIns="18288" bIns="36576" rtlCol="0" anchor="ctr">
             <a:noAutofit/>
           </a:bodyPr>
           <a:lstStyle/>
           <a:p>
+            <a:pPr algn="ctr" indent="0" marL="0">
+              <a:buNone/>
+            </a:pPr>
+            <a:r>
+              <a:rPr lang="en-US" sz="2600" dirty="0" b="1">
+                <a:solidFill>
+                  <a:srgbClr val="1B2236"/>
+                </a:solidFill>
+                <a:latin typeface="Lexend Deca" pitchFamily="34" charset="0"/>
+                <a:ea typeface="Lexend Deca" pitchFamily="34" charset="-122"/>
+                <a:cs typeface="Lexend Deca" pitchFamily="34" charset="-120"/>
+              </a:rPr>
+              <a:t>Do</a:t>
+            </a:r>
+            <a:endParaRPr lang="en-US" sz="2600" dirty="0"/>
+          </a:p>
+        </p:txBody>
+      </p:sp>
+      <p:sp>
+        <p:nvSpPr>
+          <p:cNvPr id="47" name="Question"/>
+          <p:cNvSpPr/>
+          <p:nvPr/>
+        </p:nvSpPr>
+        <p:spPr>
+          <a:xfrm>
+            <a:off x="6144768" y="3749040"/>
+            <a:ext cx="2487168" cy="868680"/>
+          </a:xfrm>
+          <a:prstGeom prst="rect">
+            <a:avLst/>
+          </a:prstGeom>
+          <a:noFill/>
+          <a:ln w="38100">
+            <a:noFill/>
+          </a:ln>
+        </p:spPr>
+        <p:txBody>
+          <a:bodyPr wrap="square" lIns="73152" tIns="36576" rIns="73152" bIns="36576" rtlCol="0" anchor="ctr">
+            <a:noAutofit/>
+          </a:bodyPr>
+          <a:lstStyle/>
+          <a:p>
             <a:pPr algn="l" indent="0" marL="0">
               <a:buNone/>
             </a:pPr>
@@ -20567,7 +20469,7 @@
                 <a:ea typeface="Lexend Deca" pitchFamily="34" charset="-122"/>
                 <a:cs typeface="Lexend Deca" pitchFamily="34" charset="-120"/>
               </a:rPr>
-              <a:t/>
+              <a:t>I have to pay today?</a:t>
             </a:r>
             <a:endParaRPr lang="en-US" sz="2200" dirty="0"/>
           </a:p>
@@ -20575,14 +20477,14 @@
       </p:sp>
       <p:sp>
         <p:nvSpPr>
-          <p:cNvPr id="67" name="Highlight"/>
-          <p:cNvSpPr/>
-          <p:nvPr/>
-        </p:nvSpPr>
-        <p:spPr>
-          <a:xfrm>
-            <a:off x="3794760" y="4114800"/>
-            <a:ext cx="1137514" cy="530352"/>
+          <p:cNvPr id="49" name="Answer bg"/>
+          <p:cNvSpPr/>
+          <p:nvPr/>
+        </p:nvSpPr>
+        <p:spPr>
+          <a:xfrm>
+            <a:off x="8668512" y="3749040"/>
+            <a:ext cx="3017520" cy="868680"/>
           </a:xfrm>
           <a:prstGeom prst="roundRect">
             <a:avLst>
@@ -20590,7 +20492,7 @@
             </a:avLst>
           </a:prstGeom>
           <a:solidFill>
-            <a:srgbClr val="FFE28C"/>
+            <a:srgbClr val="C9B8F2"/>
           </a:solidFill>
           <a:ln w="38100">
             <a:noFill/>
@@ -20622,14 +20524,14 @@
       </p:sp>
       <p:sp>
         <p:nvSpPr>
-          <p:cNvPr id="68" name="Helper"/>
-          <p:cNvSpPr/>
-          <p:nvPr/>
-        </p:nvSpPr>
-        <p:spPr>
-          <a:xfrm>
-            <a:off x="3794760" y="4114800"/>
-            <a:ext cx="1137514" cy="530352"/>
+          <p:cNvPr id="48" name="Answer"/>
+          <p:cNvSpPr/>
+          <p:nvPr/>
+        </p:nvSpPr>
+        <p:spPr>
+          <a:xfrm>
+            <a:off x="8668512" y="3749040"/>
+            <a:ext cx="3017520" cy="868680"/>
           </a:xfrm>
           <a:prstGeom prst="rect">
             <a:avLst/>
@@ -20640,14 +20542,25 @@
           </a:ln>
         </p:spPr>
         <p:txBody>
-          <a:bodyPr wrap="square" lIns="0" tIns="36576" rIns="0" bIns="36576" rtlCol="0" anchor="ctr">
+          <a:bodyPr wrap="square" lIns="73152" tIns="36576" rIns="73152" bIns="36576" rtlCol="0" anchor="ctr">
             <a:noAutofit/>
           </a:bodyPr>
           <a:lstStyle/>
           <a:p>
-            <a:pPr algn="ctr" indent="0" marL="0">
-              <a:buNone/>
-            </a:pPr>
+            <a:pPr algn="l" indent="0" marL="0">
+              <a:buNone/>
+            </a:pPr>
+            <a:r>
+              <a:rPr lang="en-US" sz="2200" dirty="0">
+                <a:solidFill>
+                  <a:srgbClr val="1B2236"/>
+                </a:solidFill>
+                <a:latin typeface="Lexend Deca" pitchFamily="34" charset="0"/>
+                <a:ea typeface="Lexend Deca" pitchFamily="34" charset="-122"/>
+                <a:cs typeface="Lexend Deca" pitchFamily="34" charset="-120"/>
+              </a:rPr>
+              <a:t>Yes, you </a:t>
+            </a:r>
             <a:r>
               <a:rPr lang="en-US" sz="2200" dirty="0" b="1">
                 <a:solidFill>
@@ -20657,22 +20570,119 @@
                 <a:ea typeface="Lexend Deca" pitchFamily="34" charset="-122"/>
                 <a:cs typeface="Lexend Deca" pitchFamily="34" charset="-120"/>
               </a:rPr>
-              <a:t>Can I</a:t>
+              <a:t>do</a:t>
+            </a:r>
+            <a:r>
+              <a:rPr lang="en-US" sz="2200" dirty="0">
+                <a:solidFill>
+                  <a:srgbClr val="1B2236"/>
+                </a:solidFill>
+                <a:latin typeface="Lexend Deca" pitchFamily="34" charset="0"/>
+                <a:ea typeface="Lexend Deca" pitchFamily="34" charset="-122"/>
+                <a:cs typeface="Lexend Deca" pitchFamily="34" charset="-120"/>
+              </a:rPr>
+              <a:t>.</a:t>
             </a:r>
             <a:endParaRPr lang="en-US" sz="2200" dirty="0"/>
           </a:p>
-        </p:txBody>
-      </p:sp>
-      <p:sp>
-        <p:nvSpPr>
-          <p:cNvPr id="69" name="Rest"/>
-          <p:cNvSpPr/>
-          <p:nvPr/>
-        </p:nvSpPr>
-        <p:spPr>
-          <a:xfrm>
-            <a:off x="4987138" y="4114800"/>
-            <a:ext cx="2144268" cy="530352"/>
+          <a:p>
+            <a:pPr algn="l" indent="0" marL="0">
+              <a:buNone/>
+            </a:pPr>
+            <a:r>
+              <a:rPr lang="en-US" sz="2200" dirty="0">
+                <a:solidFill>
+                  <a:srgbClr val="1B2236"/>
+                </a:solidFill>
+                <a:latin typeface="Lexend Deca" pitchFamily="34" charset="0"/>
+                <a:ea typeface="Lexend Deca" pitchFamily="34" charset="-122"/>
+                <a:cs typeface="Lexend Deca" pitchFamily="34" charset="-120"/>
+              </a:rPr>
+              <a:t>No, you </a:t>
+            </a:r>
+            <a:r>
+              <a:rPr lang="en-US" sz="2200" dirty="0" b="1">
+                <a:solidFill>
+                  <a:srgbClr val="1B2236"/>
+                </a:solidFill>
+                <a:latin typeface="Lexend Deca" pitchFamily="34" charset="0"/>
+                <a:ea typeface="Lexend Deca" pitchFamily="34" charset="-122"/>
+                <a:cs typeface="Lexend Deca" pitchFamily="34" charset="-120"/>
+              </a:rPr>
+              <a:t>don't</a:t>
+            </a:r>
+            <a:r>
+              <a:rPr lang="en-US" sz="2200" dirty="0">
+                <a:solidFill>
+                  <a:srgbClr val="1B2236"/>
+                </a:solidFill>
+                <a:latin typeface="Lexend Deca" pitchFamily="34" charset="0"/>
+                <a:ea typeface="Lexend Deca" pitchFamily="34" charset="-122"/>
+                <a:cs typeface="Lexend Deca" pitchFamily="34" charset="-120"/>
+              </a:rPr>
+              <a:t>.</a:t>
+            </a:r>
+            <a:endParaRPr lang="en-US" sz="2200" dirty="0"/>
+          </a:p>
+        </p:txBody>
+      </p:sp>
+      <p:sp>
+        <p:nvSpPr>
+          <p:cNvPr id="50" name="Highlight"/>
+          <p:cNvSpPr/>
+          <p:nvPr/>
+        </p:nvSpPr>
+        <p:spPr>
+          <a:xfrm>
+            <a:off x="5138928" y="4814316"/>
+            <a:ext cx="960120" cy="566928"/>
+          </a:xfrm>
+          <a:prstGeom prst="roundRect">
+            <a:avLst>
+              <a:gd name="adj" fmla="val 22000"/>
+            </a:avLst>
+          </a:prstGeom>
+          <a:solidFill>
+            <a:srgbClr val="FFE28C"/>
+          </a:solidFill>
+          <a:ln w="38100">
+            <a:noFill/>
+          </a:ln>
+        </p:spPr>
+        <p:txBody>
+          <a:bodyPr wrap="square" lIns="73152" tIns="36576" rIns="73152" bIns="36576" rtlCol="0" anchor="ctr">
+            <a:noAutofit/>
+          </a:bodyPr>
+          <a:lstStyle/>
+          <a:p>
+            <a:pPr algn="l" indent="0" marL="0">
+              <a:buNone/>
+            </a:pPr>
+            <a:r>
+              <a:rPr lang="en-US" sz="2000" dirty="0">
+                <a:solidFill>
+                  <a:srgbClr val="1B2236"/>
+                </a:solidFill>
+                <a:latin typeface="Lexend Deca" pitchFamily="34" charset="0"/>
+                <a:ea typeface="Lexend Deca" pitchFamily="34" charset="-122"/>
+                <a:cs typeface="Lexend Deca" pitchFamily="34" charset="-120"/>
+              </a:rPr>
+              <a:t/>
+            </a:r>
+            <a:endParaRPr lang="en-US" sz="2000" dirty="0"/>
+          </a:p>
+        </p:txBody>
+      </p:sp>
+      <p:sp>
+        <p:nvSpPr>
+          <p:cNvPr id="51" name="Helper"/>
+          <p:cNvSpPr/>
+          <p:nvPr/>
+        </p:nvSpPr>
+        <p:spPr>
+          <a:xfrm>
+            <a:off x="5138928" y="4663440"/>
+            <a:ext cx="960120" cy="868680"/>
           </a:xfrm>
           <a:prstGeom prst="rect">
             <a:avLst/>
@@ -20683,39 +20693,39 @@
           </a:ln>
         </p:spPr>
         <p:txBody>
-          <a:bodyPr wrap="square" lIns="0" tIns="36576" rIns="0" bIns="36576" rtlCol="0" anchor="ctr">
+          <a:bodyPr wrap="square" lIns="18288" tIns="36576" rIns="18288" bIns="36576" rtlCol="0" anchor="ctr">
             <a:noAutofit/>
           </a:bodyPr>
           <a:lstStyle/>
           <a:p>
-            <a:pPr algn="l" indent="0" marL="0">
-              <a:buNone/>
-            </a:pPr>
-            <a:r>
-              <a:rPr lang="en-US" sz="2200" dirty="0">
-                <a:solidFill>
-                  <a:srgbClr val="1B2236"/>
-                </a:solidFill>
-                <a:latin typeface="Lexend Deca" pitchFamily="34" charset="0"/>
-                <a:ea typeface="Lexend Deca" pitchFamily="34" charset="-122"/>
-                <a:cs typeface="Lexend Deca" pitchFamily="34" charset="-120"/>
-              </a:rPr>
-              <a:t>pay by phone?</a:t>
-            </a:r>
-            <a:endParaRPr lang="en-US" sz="2200" dirty="0"/>
-          </a:p>
-        </p:txBody>
-      </p:sp>
-      <p:sp>
-        <p:nvSpPr>
-          <p:cNvPr id="70" name="Wh"/>
-          <p:cNvSpPr/>
-          <p:nvPr/>
-        </p:nvSpPr>
-        <p:spPr>
-          <a:xfrm>
-            <a:off x="3520440" y="4846320"/>
-            <a:ext cx="274320" cy="530352"/>
+            <a:pPr algn="ctr" indent="0" marL="0">
+              <a:buNone/>
+            </a:pPr>
+            <a:r>
+              <a:rPr lang="en-US" sz="2600" dirty="0" b="1">
+                <a:solidFill>
+                  <a:srgbClr val="1B2236"/>
+                </a:solidFill>
+                <a:latin typeface="Lexend Deca" pitchFamily="34" charset="0"/>
+                <a:ea typeface="Lexend Deca" pitchFamily="34" charset="-122"/>
+                <a:cs typeface="Lexend Deca" pitchFamily="34" charset="-120"/>
+              </a:rPr>
+              <a:t>Do</a:t>
+            </a:r>
+            <a:endParaRPr lang="en-US" sz="2600" dirty="0"/>
+          </a:p>
+        </p:txBody>
+      </p:sp>
+      <p:sp>
+        <p:nvSpPr>
+          <p:cNvPr id="52" name="Question"/>
+          <p:cNvSpPr/>
+          <p:nvPr/>
+        </p:nvSpPr>
+        <p:spPr>
+          <a:xfrm>
+            <a:off x="6144768" y="4663440"/>
+            <a:ext cx="2487168" cy="868680"/>
           </a:xfrm>
           <a:prstGeom prst="rect">
             <a:avLst/>
@@ -20726,7 +20736,7 @@
           </a:ln>
         </p:spPr>
         <p:txBody>
-          <a:bodyPr wrap="square" lIns="0" tIns="36576" rIns="0" bIns="36576" rtlCol="0" anchor="ctr">
+          <a:bodyPr wrap="square" lIns="73152" tIns="36576" rIns="73152" bIns="36576" rtlCol="0" anchor="ctr">
             <a:noAutofit/>
           </a:bodyPr>
           <a:lstStyle/>
@@ -20743,7 +20753,7 @@
                 <a:ea typeface="Lexend Deca" pitchFamily="34" charset="-122"/>
                 <a:cs typeface="Lexend Deca" pitchFamily="34" charset="-120"/>
               </a:rPr>
-              <a:t/>
+              <a:t>we need to fill out a form?</a:t>
             </a:r>
             <a:endParaRPr lang="en-US" sz="2200" dirty="0"/>
           </a:p>
@@ -20751,14 +20761,14 @@
       </p:sp>
       <p:sp>
         <p:nvSpPr>
-          <p:cNvPr id="71" name="Highlight"/>
-          <p:cNvSpPr/>
-          <p:nvPr/>
-        </p:nvSpPr>
-        <p:spPr>
-          <a:xfrm>
-            <a:off x="3794760" y="4846320"/>
-            <a:ext cx="1137514" cy="530352"/>
+          <p:cNvPr id="54" name="Answer bg"/>
+          <p:cNvSpPr/>
+          <p:nvPr/>
+        </p:nvSpPr>
+        <p:spPr>
+          <a:xfrm>
+            <a:off x="8668512" y="4663440"/>
+            <a:ext cx="3017520" cy="868680"/>
           </a:xfrm>
           <a:prstGeom prst="roundRect">
             <a:avLst>
@@ -20766,7 +20776,7 @@
             </a:avLst>
           </a:prstGeom>
           <a:solidFill>
-            <a:srgbClr val="FFE28C"/>
+            <a:srgbClr val="C9B8F2"/>
           </a:solidFill>
           <a:ln w="38100">
             <a:noFill/>
@@ -20798,14 +20808,14 @@
       </p:sp>
       <p:sp>
         <p:nvSpPr>
-          <p:cNvPr id="72" name="Helper"/>
-          <p:cNvSpPr/>
-          <p:nvPr/>
-        </p:nvSpPr>
-        <p:spPr>
-          <a:xfrm>
-            <a:off x="3794760" y="4846320"/>
-            <a:ext cx="1137514" cy="530352"/>
+          <p:cNvPr id="53" name="Answer"/>
+          <p:cNvSpPr/>
+          <p:nvPr/>
+        </p:nvSpPr>
+        <p:spPr>
+          <a:xfrm>
+            <a:off x="8668512" y="4663440"/>
+            <a:ext cx="3017520" cy="868680"/>
           </a:xfrm>
           <a:prstGeom prst="rect">
             <a:avLst/>
@@ -20816,14 +20826,25 @@
           </a:ln>
         </p:spPr>
         <p:txBody>
-          <a:bodyPr wrap="square" lIns="0" tIns="36576" rIns="0" bIns="36576" rtlCol="0" anchor="ctr">
+          <a:bodyPr wrap="square" lIns="73152" tIns="36576" rIns="73152" bIns="36576" rtlCol="0" anchor="ctr">
             <a:noAutofit/>
           </a:bodyPr>
           <a:lstStyle/>
           <a:p>
-            <a:pPr algn="ctr" indent="0" marL="0">
-              <a:buNone/>
-            </a:pPr>
+            <a:pPr algn="l" indent="0" marL="0">
+              <a:buNone/>
+            </a:pPr>
+            <a:r>
+              <a:rPr lang="en-US" sz="2200" dirty="0">
+                <a:solidFill>
+                  <a:srgbClr val="1B2236"/>
+                </a:solidFill>
+                <a:latin typeface="Lexend Deca" pitchFamily="34" charset="0"/>
+                <a:ea typeface="Lexend Deca" pitchFamily="34" charset="-122"/>
+                <a:cs typeface="Lexend Deca" pitchFamily="34" charset="-120"/>
+              </a:rPr>
+              <a:t>Yes, you </a:t>
+            </a:r>
             <a:r>
               <a:rPr lang="en-US" sz="2200" dirty="0" b="1">
                 <a:solidFill>
@@ -20833,22 +20854,119 @@
                 <a:ea typeface="Lexend Deca" pitchFamily="34" charset="-122"/>
                 <a:cs typeface="Lexend Deca" pitchFamily="34" charset="-120"/>
               </a:rPr>
-              <a:t>Can I</a:t>
+              <a:t>do</a:t>
+            </a:r>
+            <a:r>
+              <a:rPr lang="en-US" sz="2200" dirty="0">
+                <a:solidFill>
+                  <a:srgbClr val="1B2236"/>
+                </a:solidFill>
+                <a:latin typeface="Lexend Deca" pitchFamily="34" charset="0"/>
+                <a:ea typeface="Lexend Deca" pitchFamily="34" charset="-122"/>
+                <a:cs typeface="Lexend Deca" pitchFamily="34" charset="-120"/>
+              </a:rPr>
+              <a:t>.</a:t>
             </a:r>
             <a:endParaRPr lang="en-US" sz="2200" dirty="0"/>
           </a:p>
-        </p:txBody>
-      </p:sp>
-      <p:sp>
-        <p:nvSpPr>
-          <p:cNvPr id="73" name="Rest"/>
-          <p:cNvSpPr/>
-          <p:nvPr/>
-        </p:nvSpPr>
-        <p:spPr>
-          <a:xfrm>
-            <a:off x="4987138" y="4846320"/>
-            <a:ext cx="2596896" cy="530352"/>
+          <a:p>
+            <a:pPr algn="l" indent="0" marL="0">
+              <a:buNone/>
+            </a:pPr>
+            <a:r>
+              <a:rPr lang="en-US" sz="2200" dirty="0">
+                <a:solidFill>
+                  <a:srgbClr val="1B2236"/>
+                </a:solidFill>
+                <a:latin typeface="Lexend Deca" pitchFamily="34" charset="0"/>
+                <a:ea typeface="Lexend Deca" pitchFamily="34" charset="-122"/>
+                <a:cs typeface="Lexend Deca" pitchFamily="34" charset="-120"/>
+              </a:rPr>
+              <a:t>No, you </a:t>
+            </a:r>
+            <a:r>
+              <a:rPr lang="en-US" sz="2200" dirty="0" b="1">
+                <a:solidFill>
+                  <a:srgbClr val="1B2236"/>
+                </a:solidFill>
+                <a:latin typeface="Lexend Deca" pitchFamily="34" charset="0"/>
+                <a:ea typeface="Lexend Deca" pitchFamily="34" charset="-122"/>
+                <a:cs typeface="Lexend Deca" pitchFamily="34" charset="-120"/>
+              </a:rPr>
+              <a:t>don't</a:t>
+            </a:r>
+            <a:r>
+              <a:rPr lang="en-US" sz="2200" dirty="0">
+                <a:solidFill>
+                  <a:srgbClr val="1B2236"/>
+                </a:solidFill>
+                <a:latin typeface="Lexend Deca" pitchFamily="34" charset="0"/>
+                <a:ea typeface="Lexend Deca" pitchFamily="34" charset="-122"/>
+                <a:cs typeface="Lexend Deca" pitchFamily="34" charset="-120"/>
+              </a:rPr>
+              <a:t>.</a:t>
+            </a:r>
+            <a:endParaRPr lang="en-US" sz="2200" dirty="0"/>
+          </a:p>
+        </p:txBody>
+      </p:sp>
+      <p:sp>
+        <p:nvSpPr>
+          <p:cNvPr id="55" name="Highlight"/>
+          <p:cNvSpPr/>
+          <p:nvPr/>
+        </p:nvSpPr>
+        <p:spPr>
+          <a:xfrm>
+            <a:off x="5138928" y="5728716"/>
+            <a:ext cx="960120" cy="566928"/>
+          </a:xfrm>
+          <a:prstGeom prst="roundRect">
+            <a:avLst>
+              <a:gd name="adj" fmla="val 22000"/>
+            </a:avLst>
+          </a:prstGeom>
+          <a:solidFill>
+            <a:srgbClr val="FFE28C"/>
+          </a:solidFill>
+          <a:ln w="38100">
+            <a:noFill/>
+          </a:ln>
+        </p:spPr>
+        <p:txBody>
+          <a:bodyPr wrap="square" lIns="73152" tIns="36576" rIns="73152" bIns="36576" rtlCol="0" anchor="ctr">
+            <a:noAutofit/>
+          </a:bodyPr>
+          <a:lstStyle/>
+          <a:p>
+            <a:pPr algn="l" indent="0" marL="0">
+              <a:buNone/>
+            </a:pPr>
+            <a:r>
+              <a:rPr lang="en-US" sz="2000" dirty="0">
+                <a:solidFill>
+                  <a:srgbClr val="1B2236"/>
+                </a:solidFill>
+                <a:latin typeface="Lexend Deca" pitchFamily="34" charset="0"/>
+                <a:ea typeface="Lexend Deca" pitchFamily="34" charset="-122"/>
+                <a:cs typeface="Lexend Deca" pitchFamily="34" charset="-120"/>
+              </a:rPr>
+              <a:t/>
+            </a:r>
+            <a:endParaRPr lang="en-US" sz="2000" dirty="0"/>
+          </a:p>
+        </p:txBody>
+      </p:sp>
+      <p:sp>
+        <p:nvSpPr>
+          <p:cNvPr id="56" name="Helper"/>
+          <p:cNvSpPr/>
+          <p:nvPr/>
+        </p:nvSpPr>
+        <p:spPr>
+          <a:xfrm>
+            <a:off x="5138928" y="5577840"/>
+            <a:ext cx="960120" cy="868680"/>
           </a:xfrm>
           <a:prstGeom prst="rect">
             <a:avLst/>
@@ -20859,39 +20977,39 @@
           </a:ln>
         </p:spPr>
         <p:txBody>
-          <a:bodyPr wrap="square" lIns="0" tIns="36576" rIns="0" bIns="36576" rtlCol="0" anchor="ctr">
+          <a:bodyPr wrap="square" lIns="18288" tIns="36576" rIns="18288" bIns="36576" rtlCol="0" anchor="ctr">
             <a:noAutofit/>
           </a:bodyPr>
           <a:lstStyle/>
           <a:p>
-            <a:pPr algn="l" indent="0" marL="0">
-              <a:buNone/>
-            </a:pPr>
-            <a:r>
-              <a:rPr lang="en-US" sz="2200" dirty="0">
-                <a:solidFill>
-                  <a:srgbClr val="1B2236"/>
-                </a:solidFill>
-                <a:latin typeface="Lexend Deca" pitchFamily="34" charset="0"/>
-                <a:ea typeface="Lexend Deca" pitchFamily="34" charset="-122"/>
-                <a:cs typeface="Lexend Deca" pitchFamily="34" charset="-120"/>
-              </a:rPr>
-              <a:t>leave a message?</a:t>
-            </a:r>
-            <a:endParaRPr lang="en-US" sz="2200" dirty="0"/>
-          </a:p>
-        </p:txBody>
-      </p:sp>
-      <p:sp>
-        <p:nvSpPr>
-          <p:cNvPr id="74" name="Wh"/>
-          <p:cNvSpPr/>
-          <p:nvPr/>
-        </p:nvSpPr>
-        <p:spPr>
-          <a:xfrm>
-            <a:off x="3520440" y="5577840"/>
-            <a:ext cx="274320" cy="530352"/>
+            <a:pPr algn="ctr" indent="0" marL="0">
+              <a:buNone/>
+            </a:pPr>
+            <a:r>
+              <a:rPr lang="en-US" sz="2600" dirty="0" b="1">
+                <a:solidFill>
+                  <a:srgbClr val="1B2236"/>
+                </a:solidFill>
+                <a:latin typeface="Lexend Deca" pitchFamily="34" charset="0"/>
+                <a:ea typeface="Lexend Deca" pitchFamily="34" charset="-122"/>
+                <a:cs typeface="Lexend Deca" pitchFamily="34" charset="-120"/>
+              </a:rPr>
+              <a:t>Does</a:t>
+            </a:r>
+            <a:endParaRPr lang="en-US" sz="2600" dirty="0"/>
+          </a:p>
+        </p:txBody>
+      </p:sp>
+      <p:sp>
+        <p:nvSpPr>
+          <p:cNvPr id="57" name="Question"/>
+          <p:cNvSpPr/>
+          <p:nvPr/>
+        </p:nvSpPr>
+        <p:spPr>
+          <a:xfrm>
+            <a:off x="6144768" y="5577840"/>
+            <a:ext cx="2487168" cy="868680"/>
           </a:xfrm>
           <a:prstGeom prst="rect">
             <a:avLst/>
@@ -20902,7 +21020,7 @@
           </a:ln>
         </p:spPr>
         <p:txBody>
-          <a:bodyPr wrap="square" lIns="0" tIns="36576" rIns="0" bIns="36576" rtlCol="0" anchor="ctr">
+          <a:bodyPr wrap="square" lIns="73152" tIns="36576" rIns="73152" bIns="36576" rtlCol="0" anchor="ctr">
             <a:noAutofit/>
           </a:bodyPr>
           <a:lstStyle/>
@@ -20919,7 +21037,7 @@
                 <a:ea typeface="Lexend Deca" pitchFamily="34" charset="-122"/>
                 <a:cs typeface="Lexend Deca" pitchFamily="34" charset="-120"/>
               </a:rPr>
-              <a:t/>
+              <a:t>she have to work?</a:t>
             </a:r>
             <a:endParaRPr lang="en-US" sz="2200" dirty="0"/>
           </a:p>
@@ -20927,14 +21045,14 @@
       </p:sp>
       <p:sp>
         <p:nvSpPr>
-          <p:cNvPr id="75" name="Highlight"/>
-          <p:cNvSpPr/>
-          <p:nvPr/>
-        </p:nvSpPr>
-        <p:spPr>
-          <a:xfrm>
-            <a:off x="3794760" y="5577840"/>
-            <a:ext cx="1137514" cy="530352"/>
+          <p:cNvPr id="59" name="Answer bg"/>
+          <p:cNvSpPr/>
+          <p:nvPr/>
+        </p:nvSpPr>
+        <p:spPr>
+          <a:xfrm>
+            <a:off x="8668512" y="5577840"/>
+            <a:ext cx="3017520" cy="868680"/>
           </a:xfrm>
           <a:prstGeom prst="roundRect">
             <a:avLst>
@@ -20942,7 +21060,7 @@
             </a:avLst>
           </a:prstGeom>
           <a:solidFill>
-            <a:srgbClr val="FFE28C"/>
+            <a:srgbClr val="C9B8F2"/>
           </a:solidFill>
           <a:ln w="38100">
             <a:noFill/>
@@ -20974,14 +21092,14 @@
       </p:sp>
       <p:sp>
         <p:nvSpPr>
-          <p:cNvPr id="76" name="Helper"/>
-          <p:cNvSpPr/>
-          <p:nvPr/>
-        </p:nvSpPr>
-        <p:spPr>
-          <a:xfrm>
-            <a:off x="3794760" y="5577840"/>
-            <a:ext cx="1137514" cy="530352"/>
+          <p:cNvPr id="58" name="Answer"/>
+          <p:cNvSpPr/>
+          <p:nvPr/>
+        </p:nvSpPr>
+        <p:spPr>
+          <a:xfrm>
+            <a:off x="8668512" y="5577840"/>
+            <a:ext cx="3017520" cy="868680"/>
           </a:xfrm>
           <a:prstGeom prst="rect">
             <a:avLst/>
@@ -20992,92 +21110,6 @@
           </a:ln>
         </p:spPr>
         <p:txBody>
-          <a:bodyPr wrap="square" lIns="0" tIns="36576" rIns="0" bIns="36576" rtlCol="0" anchor="ctr">
-            <a:noAutofit/>
-          </a:bodyPr>
-          <a:lstStyle/>
-          <a:p>
-            <a:pPr algn="ctr" indent="0" marL="0">
-              <a:buNone/>
-            </a:pPr>
-            <a:r>
-              <a:rPr lang="en-US" sz="2200" dirty="0" b="1">
-                <a:solidFill>
-                  <a:srgbClr val="1B2236"/>
-                </a:solidFill>
-                <a:latin typeface="Lexend Deca" pitchFamily="34" charset="0"/>
-                <a:ea typeface="Lexend Deca" pitchFamily="34" charset="-122"/>
-                <a:cs typeface="Lexend Deca" pitchFamily="34" charset="-120"/>
-              </a:rPr>
-              <a:t>Can I</a:t>
-            </a:r>
-            <a:endParaRPr lang="en-US" sz="2200" dirty="0"/>
-          </a:p>
-        </p:txBody>
-      </p:sp>
-      <p:sp>
-        <p:nvSpPr>
-          <p:cNvPr id="77" name="Rest"/>
-          <p:cNvSpPr/>
-          <p:nvPr/>
-        </p:nvSpPr>
-        <p:spPr>
-          <a:xfrm>
-            <a:off x="4987138" y="5577840"/>
-            <a:ext cx="2898648" cy="530352"/>
-          </a:xfrm>
-          <a:prstGeom prst="rect">
-            <a:avLst/>
-          </a:prstGeom>
-          <a:noFill/>
-          <a:ln w="38100">
-            <a:noFill/>
-          </a:ln>
-        </p:spPr>
-        <p:txBody>
-          <a:bodyPr wrap="square" lIns="0" tIns="36576" rIns="0" bIns="36576" rtlCol="0" anchor="ctr">
-            <a:noAutofit/>
-          </a:bodyPr>
-          <a:lstStyle/>
-          <a:p>
-            <a:pPr algn="l" indent="0" marL="0">
-              <a:buNone/>
-            </a:pPr>
-            <a:r>
-              <a:rPr lang="en-US" sz="2200" dirty="0">
-                <a:solidFill>
-                  <a:srgbClr val="1B2236"/>
-                </a:solidFill>
-                <a:latin typeface="Lexend Deca" pitchFamily="34" charset="0"/>
-                <a:ea typeface="Lexend Deca" pitchFamily="34" charset="-122"/>
-                <a:cs typeface="Lexend Deca" pitchFamily="34" charset="-120"/>
-              </a:rPr>
-              <a:t>talk to a manager?</a:t>
-            </a:r>
-            <a:endParaRPr lang="en-US" sz="2200" dirty="0"/>
-          </a:p>
-        </p:txBody>
-      </p:sp>
-      <p:sp>
-        <p:nvSpPr>
-          <p:cNvPr id="78" name="Card head"/>
-          <p:cNvSpPr/>
-          <p:nvPr/>
-        </p:nvSpPr>
-        <p:spPr>
-          <a:xfrm>
-            <a:off x="8549640" y="1280160"/>
-            <a:ext cx="3017520" cy="548640"/>
-          </a:xfrm>
-          <a:prstGeom prst="rect">
-            <a:avLst/>
-          </a:prstGeom>
-          <a:noFill/>
-          <a:ln w="38100">
-            <a:noFill/>
-          </a:ln>
-        </p:spPr>
-        <p:txBody>
           <a:bodyPr wrap="square" lIns="73152" tIns="36576" rIns="73152" bIns="36576" rtlCol="0" anchor="ctr">
             <a:noAutofit/>
           </a:bodyPr>
@@ -21087,182 +21119,45 @@
               <a:buNone/>
             </a:pPr>
             <a:r>
-              <a:rPr lang="en-US" sz="2400" dirty="0" b="1">
-                <a:solidFill>
-                  <a:srgbClr val="1B2236"/>
-                </a:solidFill>
-                <a:latin typeface="Lexend Deca" pitchFamily="34" charset="0"/>
-                <a:ea typeface="Lexend Deca" pitchFamily="34" charset="-122"/>
-                <a:cs typeface="Lexend Deca" pitchFamily="34" charset="-120"/>
-              </a:rPr>
-              <a:t>Answers</a:t>
-            </a:r>
-            <a:endParaRPr lang="en-US" sz="2400" dirty="0"/>
-          </a:p>
-        </p:txBody>
-      </p:sp>
-      <p:sp>
-        <p:nvSpPr>
-          <p:cNvPr id="79" name="Card item"/>
-          <p:cNvSpPr/>
-          <p:nvPr/>
-        </p:nvSpPr>
-        <p:spPr>
-          <a:xfrm>
-            <a:off x="8549640" y="1920240"/>
-            <a:ext cx="3017520" cy="457200"/>
-          </a:xfrm>
-          <a:prstGeom prst="rect">
-            <a:avLst/>
-          </a:prstGeom>
-          <a:noFill/>
-          <a:ln w="38100">
-            <a:noFill/>
-          </a:ln>
-        </p:spPr>
-        <p:txBody>
-          <a:bodyPr wrap="square" lIns="73152" tIns="36576" rIns="73152" bIns="36576" rtlCol="0" anchor="ctr">
-            <a:noAutofit/>
-          </a:bodyPr>
-          <a:lstStyle/>
+              <a:rPr lang="en-US" sz="2200" dirty="0">
+                <a:solidFill>
+                  <a:srgbClr val="1B2236"/>
+                </a:solidFill>
+                <a:latin typeface="Lexend Deca" pitchFamily="34" charset="0"/>
+                <a:ea typeface="Lexend Deca" pitchFamily="34" charset="-122"/>
+                <a:cs typeface="Lexend Deca" pitchFamily="34" charset="-120"/>
+              </a:rPr>
+              <a:t>Yes, she </a:t>
+            </a:r>
+            <a:r>
+              <a:rPr lang="en-US" sz="2200" dirty="0" b="1">
+                <a:solidFill>
+                  <a:srgbClr val="1B2236"/>
+                </a:solidFill>
+                <a:latin typeface="Lexend Deca" pitchFamily="34" charset="0"/>
+                <a:ea typeface="Lexend Deca" pitchFamily="34" charset="-122"/>
+                <a:cs typeface="Lexend Deca" pitchFamily="34" charset="-120"/>
+              </a:rPr>
+              <a:t>does</a:t>
+            </a:r>
+            <a:r>
+              <a:rPr lang="en-US" sz="2200" dirty="0">
+                <a:solidFill>
+                  <a:srgbClr val="1B2236"/>
+                </a:solidFill>
+                <a:latin typeface="Lexend Deca" pitchFamily="34" charset="0"/>
+                <a:ea typeface="Lexend Deca" pitchFamily="34" charset="-122"/>
+                <a:cs typeface="Lexend Deca" pitchFamily="34" charset="-120"/>
+              </a:rPr>
+              <a:t>.</a:t>
+            </a:r>
+            <a:endParaRPr lang="en-US" sz="2200" dirty="0"/>
+          </a:p>
           <a:p>
             <a:pPr algn="l" indent="0" marL="0">
               <a:buNone/>
             </a:pPr>
             <a:r>
-              <a:rPr lang="en-US" sz="2000" dirty="0">
-                <a:solidFill>
-                  <a:srgbClr val="1B2236"/>
-                </a:solidFill>
-                <a:latin typeface="Lexend Deca" pitchFamily="34" charset="0"/>
-                <a:ea typeface="Lexend Deca" pitchFamily="34" charset="-122"/>
-                <a:cs typeface="Lexend Deca" pitchFamily="34" charset="-120"/>
-              </a:rPr>
-              <a:t>Yes, you can.</a:t>
-            </a:r>
-            <a:endParaRPr lang="en-US" sz="2000" dirty="0"/>
-          </a:p>
-        </p:txBody>
-      </p:sp>
-      <p:sp>
-        <p:nvSpPr>
-          <p:cNvPr id="80" name="Card item"/>
-          <p:cNvSpPr/>
-          <p:nvPr/>
-        </p:nvSpPr>
-        <p:spPr>
-          <a:xfrm>
-            <a:off x="8549640" y="2404872"/>
-            <a:ext cx="3017520" cy="777240"/>
-          </a:xfrm>
-          <a:prstGeom prst="rect">
-            <a:avLst/>
-          </a:prstGeom>
-          <a:noFill/>
-          <a:ln w="38100">
-            <a:noFill/>
-          </a:ln>
-        </p:spPr>
-        <p:txBody>
-          <a:bodyPr wrap="square" lIns="73152" tIns="36576" rIns="73152" bIns="36576" rtlCol="0" anchor="ctr">
-            <a:noAutofit/>
-          </a:bodyPr>
-          <a:lstStyle/>
-          <a:p>
-            <a:pPr algn="l" indent="0" marL="0">
-              <a:buNone/>
-            </a:pPr>
-            <a:r>
-              <a:rPr lang="en-US" sz="2000" dirty="0">
-                <a:solidFill>
-                  <a:srgbClr val="1B2236"/>
-                </a:solidFill>
-                <a:latin typeface="Lexend Deca" pitchFamily="34" charset="0"/>
-                <a:ea typeface="Lexend Deca" pitchFamily="34" charset="-122"/>
-                <a:cs typeface="Lexend Deca" pitchFamily="34" charset="-120"/>
-              </a:rPr>
-              <a:t>Sure. One moment, please.</a:t>
-            </a:r>
-            <a:endParaRPr lang="en-US" sz="2000" dirty="0"/>
-          </a:p>
-        </p:txBody>
-      </p:sp>
-      <p:sp>
-        <p:nvSpPr>
-          <p:cNvPr id="81" name="Card item"/>
-          <p:cNvSpPr/>
-          <p:nvPr/>
-        </p:nvSpPr>
-        <p:spPr>
-          <a:xfrm>
-            <a:off x="8549640" y="3209544"/>
-            <a:ext cx="3017520" cy="457200"/>
-          </a:xfrm>
-          <a:prstGeom prst="rect">
-            <a:avLst/>
-          </a:prstGeom>
-          <a:noFill/>
-          <a:ln w="38100">
-            <a:noFill/>
-          </a:ln>
-        </p:spPr>
-        <p:txBody>
-          <a:bodyPr wrap="square" lIns="73152" tIns="36576" rIns="73152" bIns="36576" rtlCol="0" anchor="ctr">
-            <a:noAutofit/>
-          </a:bodyPr>
-          <a:lstStyle/>
-          <a:p>
-            <a:pPr algn="l" indent="0" marL="0">
-              <a:buNone/>
-            </a:pPr>
-            <a:r>
-              <a:rPr lang="en-US" sz="2000" dirty="0">
-                <a:solidFill>
-                  <a:srgbClr val="1B2236"/>
-                </a:solidFill>
-                <a:latin typeface="Lexend Deca" pitchFamily="34" charset="0"/>
-                <a:ea typeface="Lexend Deca" pitchFamily="34" charset="-122"/>
-                <a:cs typeface="Lexend Deca" pitchFamily="34" charset="-120"/>
-              </a:rPr>
-              <a:t>Sorry, you can't.</a:t>
-            </a:r>
-            <a:endParaRPr lang="en-US" sz="2000" dirty="0"/>
-          </a:p>
-        </p:txBody>
-      </p:sp>
-      <p:sp>
-        <p:nvSpPr>
-          <p:cNvPr id="82" name="Example"/>
-          <p:cNvSpPr/>
-          <p:nvPr/>
-        </p:nvSpPr>
-        <p:spPr>
-          <a:xfrm>
-            <a:off x="8549640" y="5029200"/>
-            <a:ext cx="3017520" cy="868680"/>
-          </a:xfrm>
-          <a:prstGeom prst="roundRect">
-            <a:avLst>
-              <a:gd name="adj" fmla="val 22000"/>
-            </a:avLst>
-          </a:prstGeom>
-          <a:solidFill>
-            <a:srgbClr val="FFFFFF"/>
-          </a:solidFill>
-          <a:ln w="38100">
-            <a:noFill/>
-          </a:ln>
-        </p:spPr>
-        <p:txBody>
-          <a:bodyPr wrap="square" lIns="73152" tIns="36576" rIns="73152" bIns="36576" rtlCol="0" anchor="ctr">
-            <a:noAutofit/>
-          </a:bodyPr>
-          <a:lstStyle/>
-          <a:p>
-            <a:pPr algn="ctr" indent="0" marL="0">
-              <a:buNone/>
-            </a:pPr>
-            <a:r>
               <a:rPr lang="en-US" sz="2200" dirty="0">
                 <a:solidFill>
                   <a:srgbClr val="1B2236"/>
@@ -21271,18 +21166,18 @@
                 <a:ea typeface="Lexend Deca" pitchFamily="34" charset="-122"/>
                 <a:cs typeface="Lexend Deca" pitchFamily="34" charset="-120"/>
               </a:rPr>
-              <a:t>You </a:t>
+              <a:t>No, she </a:t>
             </a:r>
             <a:r>
               <a:rPr lang="en-US" sz="2200" dirty="0" b="1">
                 <a:solidFill>
-                  <a:srgbClr val="5B3FC4"/>
-                </a:solidFill>
-                <a:latin typeface="Lexend Deca" pitchFamily="34" charset="0"/>
-                <a:ea typeface="Lexend Deca" pitchFamily="34" charset="-122"/>
-                <a:cs typeface="Lexend Deca" pitchFamily="34" charset="-120"/>
-              </a:rPr>
-              <a:t>have to</a:t>
+                  <a:srgbClr val="1B2236"/>
+                </a:solidFill>
+                <a:latin typeface="Lexend Deca" pitchFamily="34" charset="0"/>
+                <a:ea typeface="Lexend Deca" pitchFamily="34" charset="-122"/>
+                <a:cs typeface="Lexend Deca" pitchFamily="34" charset="-120"/>
+              </a:rPr>
+              <a:t>doesn't</a:t>
             </a:r>
             <a:r>
               <a:rPr lang="en-US" sz="2200" dirty="0">
@@ -21293,7 +21188,7 @@
                 <a:ea typeface="Lexend Deca" pitchFamily="34" charset="-122"/>
                 <a:cs typeface="Lexend Deca" pitchFamily="34" charset="-120"/>
               </a:rPr>
-              <a:t> come in person.</a:t>
+              <a:t>.</a:t>
             </a:r>
             <a:endParaRPr lang="en-US" sz="2200" dirty="0"/>
           </a:p>
@@ -21338,7 +21233,7 @@
                                           </p:stCondLst>
                                         </p:cTn>
                                         <p:tgtEl>
-                                          <p:spTgt spid="67"/>
+                                          <p:spTgt spid="45"/>
                                         </p:tgtEl>
                                         <p:attrNameLst>
                                           <p:attrName>style.visibility</p:attrName>
@@ -21352,7 +21247,42 @@
                                       <p:cBhvr>
                                         <p:cTn id="7" dur="400"/>
                                         <p:tgtEl>
-                                          <p:spTgt spid="67"/>
+                                          <p:spTgt spid="45"/>
+                                        </p:tgtEl>
+                                      </p:cBhvr>
+                                    </p:animEffect>
+                                  </p:childTnLst>
+                                </p:cTn>
+                              </p:par>
+                              <p:par>
+                                <p:cTn id="8" presetID="10" presetClass="entr" presetSubtype="0" fill="hold" nodeType="withEffect">
+                                  <p:stCondLst>
+                                    <p:cond delay="0"/>
+                                  </p:stCondLst>
+                                  <p:childTnLst>
+                                    <p:set>
+                                      <p:cBhvr>
+                                        <p:cTn id="9" dur="1" fill="hold">
+                                          <p:stCondLst>
+                                            <p:cond delay="0"/>
+                                          </p:stCondLst>
+                                        </p:cTn>
+                                        <p:tgtEl>
+                                          <p:spTgt spid="49"/>
+                                        </p:tgtEl>
+                                        <p:attrNameLst>
+                                          <p:attrName>style.visibility</p:attrName>
+                                        </p:attrNameLst>
+                                      </p:cBhvr>
+                                      <p:to>
+                                        <p:strVal val="visible"/>
+                                      </p:to>
+                                    </p:set>
+                                    <p:animEffect transition="in" filter="fade">
+                                      <p:cBhvr>
+                                        <p:cTn id="10" dur="400"/>
+                                        <p:tgtEl>
+                                          <p:spTgt spid="49"/>
                                         </p:tgtEl>
                                       </p:cBhvr>
                                     </p:animEffect>
@@ -21366,32 +21296,32 @@
                     </p:cTn>
                   </p:par>
                   <p:par>
-                    <p:cTn id="8" fill="hold">
+                    <p:cTn id="11" fill="hold">
                       <p:stCondLst>
                         <p:cond delay="indefinite"/>
                       </p:stCondLst>
                       <p:childTnLst>
                         <p:par>
-                          <p:cTn id="9" fill="hold">
+                          <p:cTn id="12" fill="hold">
                             <p:stCondLst>
                               <p:cond delay="0"/>
                             </p:stCondLst>
                             <p:childTnLst>
                               <p:par>
-                                <p:cTn id="10" presetID="10" presetClass="entr" presetSubtype="0" fill="hold" nodeType="clickEffect">
+                                <p:cTn id="13" presetID="10" presetClass="entr" presetSubtype="0" fill="hold" nodeType="clickEffect">
                                   <p:stCondLst>
                                     <p:cond delay="0"/>
                                   </p:stCondLst>
                                   <p:childTnLst>
                                     <p:set>
                                       <p:cBhvr>
-                                        <p:cTn id="11" dur="1" fill="hold">
+                                        <p:cTn id="14" dur="1" fill="hold">
                                           <p:stCondLst>
                                             <p:cond delay="0"/>
                                           </p:stCondLst>
                                         </p:cTn>
                                         <p:tgtEl>
-                                          <p:spTgt spid="71"/>
+                                          <p:spTgt spid="50"/>
                                         </p:tgtEl>
                                         <p:attrNameLst>
                                           <p:attrName>style.visibility</p:attrName>
@@ -21403,9 +21333,44 @@
                                     </p:set>
                                     <p:animEffect transition="in" filter="fade">
                                       <p:cBhvr>
-                                        <p:cTn id="12" dur="400"/>
+                                        <p:cTn id="15" dur="400"/>
                                         <p:tgtEl>
-                                          <p:spTgt spid="71"/>
+                                          <p:spTgt spid="50"/>
+                                        </p:tgtEl>
+                                      </p:cBhvr>
+                                    </p:animEffect>
+                                  </p:childTnLst>
+                                </p:cTn>
+                              </p:par>
+                              <p:par>
+                                <p:cTn id="16" presetID="10" presetClass="entr" presetSubtype="0" fill="hold" nodeType="withEffect">
+                                  <p:stCondLst>
+                                    <p:cond delay="0"/>
+                                  </p:stCondLst>
+                                  <p:childTnLst>
+                                    <p:set>
+                                      <p:cBhvr>
+                                        <p:cTn id="17" dur="1" fill="hold">
+                                          <p:stCondLst>
+                                            <p:cond delay="0"/>
+                                          </p:stCondLst>
+                                        </p:cTn>
+                                        <p:tgtEl>
+                                          <p:spTgt spid="54"/>
+                                        </p:tgtEl>
+                                        <p:attrNameLst>
+                                          <p:attrName>style.visibility</p:attrName>
+                                        </p:attrNameLst>
+                                      </p:cBhvr>
+                                      <p:to>
+                                        <p:strVal val="visible"/>
+                                      </p:to>
+                                    </p:set>
+                                    <p:animEffect transition="in" filter="fade">
+                                      <p:cBhvr>
+                                        <p:cTn id="18" dur="400"/>
+                                        <p:tgtEl>
+                                          <p:spTgt spid="54"/>
                                         </p:tgtEl>
                                       </p:cBhvr>
                                     </p:animEffect>
@@ -21419,32 +21384,32 @@
                     </p:cTn>
                   </p:par>
                   <p:par>
-                    <p:cTn id="13" fill="hold">
+                    <p:cTn id="19" fill="hold">
                       <p:stCondLst>
                         <p:cond delay="indefinite"/>
                       </p:stCondLst>
                       <p:childTnLst>
                         <p:par>
-                          <p:cTn id="14" fill="hold">
+                          <p:cTn id="20" fill="hold">
                             <p:stCondLst>
                               <p:cond delay="0"/>
                             </p:stCondLst>
                             <p:childTnLst>
                               <p:par>
-                                <p:cTn id="15" presetID="10" presetClass="entr" presetSubtype="0" fill="hold" nodeType="clickEffect">
+                                <p:cTn id="21" presetID="10" presetClass="entr" presetSubtype="0" fill="hold" nodeType="clickEffect">
                                   <p:stCondLst>
                                     <p:cond delay="0"/>
                                   </p:stCondLst>
                                   <p:childTnLst>
                                     <p:set>
                                       <p:cBhvr>
-                                        <p:cTn id="16" dur="1" fill="hold">
+                                        <p:cTn id="22" dur="1" fill="hold">
                                           <p:stCondLst>
                                             <p:cond delay="0"/>
                                           </p:stCondLst>
                                         </p:cTn>
                                         <p:tgtEl>
-                                          <p:spTgt spid="75"/>
+                                          <p:spTgt spid="55"/>
                                         </p:tgtEl>
                                         <p:attrNameLst>
                                           <p:attrName>style.visibility</p:attrName>
@@ -21456,9 +21421,44 @@
                                     </p:set>
                                     <p:animEffect transition="in" filter="fade">
                                       <p:cBhvr>
-                                        <p:cTn id="17" dur="400"/>
+                                        <p:cTn id="23" dur="400"/>
                                         <p:tgtEl>
-                                          <p:spTgt spid="75"/>
+                                          <p:spTgt spid="55"/>
+                                        </p:tgtEl>
+                                      </p:cBhvr>
+                                    </p:animEffect>
+                                  </p:childTnLst>
+                                </p:cTn>
+                              </p:par>
+                              <p:par>
+                                <p:cTn id="24" presetID="10" presetClass="entr" presetSubtype="0" fill="hold" nodeType="withEffect">
+                                  <p:stCondLst>
+                                    <p:cond delay="0"/>
+                                  </p:stCondLst>
+                                  <p:childTnLst>
+                                    <p:set>
+                                      <p:cBhvr>
+                                        <p:cTn id="25" dur="1" fill="hold">
+                                          <p:stCondLst>
+                                            <p:cond delay="0"/>
+                                          </p:stCondLst>
+                                        </p:cTn>
+                                        <p:tgtEl>
+                                          <p:spTgt spid="59"/>
+                                        </p:tgtEl>
+                                        <p:attrNameLst>
+                                          <p:attrName>style.visibility</p:attrName>
+                                        </p:attrNameLst>
+                                      </p:cBhvr>
+                                      <p:to>
+                                        <p:strVal val="visible"/>
+                                      </p:to>
+                                    </p:set>
+                                    <p:animEffect transition="in" filter="fade">
+                                      <p:cBhvr>
+                                        <p:cTn id="26" dur="400"/>
+                                        <p:tgtEl>
+                                          <p:spTgt spid="59"/>
                                         </p:tgtEl>
                                       </p:cBhvr>
                                     </p:animEffect>
